--- a/docs/pptx/Ch13_P7_Measuring_Efficiency.pptx
+++ b/docs/pptx/Ch13_P7_Measuring_Efficiency.pptx
@@ -506,7 +506,11 @@
           <a:p>
             <a:r>
               <a:rPr lang="en-US" dirty="0"/>
-              <a:t/>
+              <a:t>TITRE: Mesurer l'Efficacité
+d'un Algorithme
+Critère: Critère P7 — Benchmark, runtime, resources
+Objectif de cette présentation : couvrir les concepts clés pour le critère Critère P7 — Benchmark, runtime, resources.
+Durée estimée : 1h30 à 2h avec exercices.</a:t>
             </a:r>
             <a:endParaRPr lang="en-US" dirty="0"/>
           </a:p>
@@ -594,7 +598,10 @@
           <a:p>
             <a:r>
               <a:rPr lang="en-US" dirty="0"/>
-              <a:t/>
+              <a:t>PROF: Basé sur BENCHMARK.pdf.
+Analogie : Big O = le plan du trajet, Benchmark = le chronomètre.
+O(n log n) est 'meilleur' que O(n²), mais dans certains cas concrets, un O(n²) bien optimisé peut être plus rapide pour de petits n.
+Lien Maven pour le benchmark : montrer comment ajouter une dépendance de benchmark.</a:t>
             </a:r>
             <a:endParaRPr lang="en-US" dirty="0"/>
           </a:p>
@@ -682,7 +689,13 @@
           <a:p>
             <a:r>
               <a:rPr lang="en-US" dirty="0"/>
-              <a:t/>
+              <a:t>PROF: Coder en live un benchmark simple :
+long start = System.nanoTime();
+// algorithme
+long end = System.nanoTime();
+long duration = (end - start) / 1_000_000; // ms
+Faire comparer Bubble Sort vs Arrays.sort() pour n=10000.
+Exercice : les étudiants benchmarkent ArrayList.get() vs LinkedList.get() pour n=100000.</a:t>
             </a:r>
             <a:endParaRPr lang="en-US" dirty="0"/>
           </a:p>
@@ -770,7 +783,10 @@
           <a:p>
             <a:r>
               <a:rPr lang="en-US" dirty="0"/>
-              <a:t/>
+              <a:t>PROF: Demander aux étudiants : 'À part l'algorithme, qu'est-ce qui peut rendre un programme lent ?'
+Liste attendue : RAM insuffisante, disque lent, réseau, GC pauses.
+Montrer que malgré ces facteurs, le choix d'algorithme reste le plus impactant.
+Exemple : un O(n²) sur un super-ordinateur sera PLUS LENT qu'un O(n log n) sur un PC portable pour n=1M.</a:t>
             </a:r>
             <a:endParaRPr lang="en-US" dirty="0"/>
           </a:p>
@@ -858,7 +874,8 @@
           <a:p>
             <a:r>
               <a:rPr lang="en-US" dirty="0"/>
-              <a:t/>
+              <a:t>PROF: Devoir P7 : choisir 2 algorithmes, les benchmarker en Java pour 3 tailles de n, et comparer avec la prédiction Big O.
+Site : Monde 4 Ch13 + Ch14 (benchmark simulé).</a:t>
             </a:r>
             <a:endParaRPr lang="en-US" dirty="0"/>
           </a:p>
@@ -1213,7 +1230,7 @@
     <p:bg>
       <p:bgPr>
         <a:solidFill>
-          <a:srgbClr val="1B2A4A"/>
+          <a:srgbClr val="1A1500"/>
         </a:solidFill>
       </p:bgPr>
     </p:bg>
@@ -1240,13 +1257,13 @@
         <p:spPr>
           <a:xfrm>
             <a:off x="0" y="0"/>
-            <a:ext cx="9144000" cy="1097280"/>
+            <a:ext cx="9144000" cy="73152"/>
           </a:xfrm>
           <a:prstGeom prst="rect">
             <a:avLst/>
           </a:prstGeom>
           <a:solidFill>
-            <a:srgbClr val="065A82"/>
+            <a:srgbClr val="D97706"/>
           </a:solidFill>
           <a:ln/>
         </p:spPr>
@@ -1259,7 +1276,7 @@
         </p:nvSpPr>
         <p:spPr>
           <a:xfrm>
-            <a:off x="731520" y="137160"/>
+            <a:off x="548640" y="365760"/>
             <a:ext cx="2743200" cy="365760"/>
           </a:xfrm>
           <a:prstGeom prst="rect">
@@ -1276,9 +1293,9 @@
               <a:buNone/>
             </a:pPr>
             <a:r>
-              <a:rPr lang="en-US" sz="1400" b="1" dirty="0">
-                <a:solidFill>
-                  <a:srgbClr val="00A896"/>
+              <a:rPr lang="en-US" sz="1200" b="1" spc="400" kern="0" dirty="0">
+                <a:solidFill>
+                  <a:srgbClr val="D97706"/>
                 </a:solidFill>
                 <a:latin typeface="Calibri" pitchFamily="34" charset="0"/>
                 <a:ea typeface="Calibri" pitchFamily="34" charset="-122"/>
@@ -1286,7 +1303,7 @@
               </a:rPr>
               <a:t>MONDE 4</a:t>
             </a:r>
-            <a:endParaRPr lang="en-US" sz="1400" dirty="0"/>
+            <a:endParaRPr lang="en-US" sz="1200" dirty="0"/>
           </a:p>
         </p:txBody>
       </p:sp>
@@ -1298,8 +1315,8 @@
         </p:nvSpPr>
         <p:spPr>
           <a:xfrm>
-            <a:off x="731520" y="457200"/>
-            <a:ext cx="7315200" cy="457200"/>
+            <a:off x="548640" y="731520"/>
+            <a:ext cx="7315200" cy="365760"/>
           </a:xfrm>
           <a:prstGeom prst="rect">
             <a:avLst/>
@@ -1315,9 +1332,9 @@
               <a:buNone/>
             </a:pPr>
             <a:r>
-              <a:rPr lang="en-US" sz="1200" dirty="0">
-                <a:solidFill>
-                  <a:srgbClr val="E2E8F0"/>
+              <a:rPr lang="en-US" sz="1100" dirty="0">
+                <a:solidFill>
+                  <a:srgbClr val="94A3B8"/>
                 </a:solidFill>
                 <a:latin typeface="Calibri" pitchFamily="34" charset="0"/>
                 <a:ea typeface="Calibri" pitchFamily="34" charset="-122"/>
@@ -1325,7 +1342,7 @@
               </a:rPr>
               <a:t>UNIT 19 : Data Structures &amp; Algorithms</a:t>
             </a:r>
-            <a:endParaRPr lang="en-US" sz="1200" dirty="0"/>
+            <a:endParaRPr lang="en-US" sz="1100" dirty="0"/>
           </a:p>
         </p:txBody>
       </p:sp>
@@ -1337,8 +1354,8 @@
         </p:nvSpPr>
         <p:spPr>
           <a:xfrm>
-            <a:off x="731520" y="1645920"/>
-            <a:ext cx="7315200" cy="640080"/>
+            <a:off x="548640" y="1371600"/>
+            <a:ext cx="8229600" cy="457200"/>
           </a:xfrm>
           <a:prstGeom prst="rect">
             <a:avLst/>
@@ -1354,17 +1371,17 @@
               <a:buNone/>
             </a:pPr>
             <a:r>
-              <a:rPr lang="en-US" sz="4400" b="1" dirty="0">
-                <a:solidFill>
-                  <a:srgbClr val="FFFFFF"/>
-                </a:solidFill>
-                <a:latin typeface="Trebuchet MS" pitchFamily="34" charset="0"/>
-                <a:ea typeface="Trebuchet MS" pitchFamily="34" charset="-122"/>
-                <a:cs typeface="Trebuchet MS" pitchFamily="34" charset="-120"/>
+              <a:rPr lang="en-US" sz="1400" b="1" dirty="0">
+                <a:solidFill>
+                  <a:srgbClr val="D97706"/>
+                </a:solidFill>
+                <a:latin typeface="Calibri" pitchFamily="34" charset="0"/>
+                <a:ea typeface="Calibri" pitchFamily="34" charset="-122"/>
+                <a:cs typeface="Calibri" pitchFamily="34" charset="-120"/>
               </a:rPr>
               <a:t>Chapitre 13</a:t>
             </a:r>
-            <a:endParaRPr lang="en-US" sz="4400" dirty="0"/>
+            <a:endParaRPr lang="en-US" sz="1400" dirty="0"/>
           </a:p>
         </p:txBody>
       </p:sp>
@@ -1376,8 +1393,8 @@
         </p:nvSpPr>
         <p:spPr>
           <a:xfrm>
-            <a:off x="731520" y="2286000"/>
-            <a:ext cx="7315200" cy="1097280"/>
+            <a:off x="548640" y="2011680"/>
+            <a:ext cx="8229600" cy="1371600"/>
           </a:xfrm>
           <a:prstGeom prst="rect">
             <a:avLst/>
@@ -1393,95 +1410,95 @@
               <a:buNone/>
             </a:pPr>
             <a:r>
-              <a:rPr lang="en-US" sz="3000" b="1" dirty="0">
-                <a:solidFill>
-                  <a:srgbClr val="00A896"/>
-                </a:solidFill>
-                <a:latin typeface="Trebuchet MS" pitchFamily="34" charset="0"/>
-                <a:ea typeface="Trebuchet MS" pitchFamily="34" charset="-122"/>
-                <a:cs typeface="Trebuchet MS" pitchFamily="34" charset="-120"/>
-              </a:rPr>
-              <a:t>Mesurer l'efficacité</a:t>
-            </a:r>
-            <a:endParaRPr lang="en-US" sz="3000" dirty="0"/>
-          </a:p>
-          <a:p>
-            <a:pPr indent="0" marL="0">
-              <a:buNone/>
-            </a:pPr>
-            <a:r>
-              <a:rPr lang="en-US" sz="3000" b="1" dirty="0">
-                <a:solidFill>
-                  <a:srgbClr val="00A896"/>
-                </a:solidFill>
-                <a:latin typeface="Trebuchet MS" pitchFamily="34" charset="0"/>
-                <a:ea typeface="Trebuchet MS" pitchFamily="34" charset="-122"/>
-                <a:cs typeface="Trebuchet MS" pitchFamily="34" charset="-120"/>
-              </a:rPr>
-              <a:t>d'un algorithme</a:t>
-            </a:r>
-            <a:endParaRPr lang="en-US" sz="3000" dirty="0"/>
-          </a:p>
-        </p:txBody>
-      </p:sp>
-      <p:sp>
-        <p:nvSpPr>
-          <p:cNvPr id="7" name="Shape 5"/>
-          <p:cNvSpPr/>
-          <p:nvPr/>
-        </p:nvSpPr>
-        <p:spPr>
-          <a:xfrm>
-            <a:off x="731520" y="3657600"/>
-            <a:ext cx="2286000" cy="54864"/>
-          </a:xfrm>
-          <a:prstGeom prst="rect">
-            <a:avLst/>
-          </a:prstGeom>
-          <a:solidFill>
-            <a:srgbClr val="F97316"/>
-          </a:solidFill>
-          <a:ln/>
-        </p:spPr>
-      </p:sp>
-      <p:sp>
-        <p:nvSpPr>
-          <p:cNvPr id="8" name="Text 6"/>
-          <p:cNvSpPr/>
-          <p:nvPr/>
-        </p:nvSpPr>
-        <p:spPr>
-          <a:xfrm>
-            <a:off x="731520" y="3840480"/>
-            <a:ext cx="7315200" cy="731520"/>
-          </a:xfrm>
-          <a:prstGeom prst="rect">
-            <a:avLst/>
-          </a:prstGeom>
-          <a:noFill/>
-          <a:ln/>
-        </p:spPr>
-        <p:txBody>
-          <a:bodyPr wrap="square" rtlCol="0" anchor="ctr"/>
-          <a:lstStyle/>
-          <a:p>
-            <a:pPr indent="0" marL="0">
-              <a:buNone/>
-            </a:pPr>
-            <a:r>
-              <a:rPr lang="en-US" sz="1300" i="1" dirty="0">
-                <a:solidFill>
-                  <a:srgbClr val="E2E8F0"/>
+              <a:rPr lang="en-US" sz="3600" b="1" dirty="0">
+                <a:solidFill>
+                  <a:srgbClr val="FFFFFF"/>
                 </a:solidFill>
                 <a:latin typeface="Calibri" pitchFamily="34" charset="0"/>
                 <a:ea typeface="Calibri" pitchFamily="34" charset="-122"/>
                 <a:cs typeface="Calibri" pitchFamily="34" charset="-120"/>
               </a:rPr>
-              <a:t>P7</a:t>
+              <a:t>Mesurer l'Efficacité</a:t>
+            </a:r>
+            <a:endParaRPr lang="en-US" sz="3600" dirty="0"/>
+          </a:p>
+          <a:p>
+            <a:pPr indent="0" marL="0">
+              <a:buNone/>
+            </a:pPr>
+            <a:r>
+              <a:rPr lang="en-US" sz="3600" b="1" dirty="0">
+                <a:solidFill>
+                  <a:srgbClr val="FFFFFF"/>
+                </a:solidFill>
+                <a:latin typeface="Calibri" pitchFamily="34" charset="0"/>
+                <a:ea typeface="Calibri" pitchFamily="34" charset="-122"/>
+                <a:cs typeface="Calibri" pitchFamily="34" charset="-120"/>
+              </a:rPr>
+              <a:t>d'un Algorithme</a:t>
+            </a:r>
+            <a:endParaRPr lang="en-US" sz="3600" dirty="0"/>
+          </a:p>
+        </p:txBody>
+      </p:sp>
+      <p:sp>
+        <p:nvSpPr>
+          <p:cNvPr id="7" name="Text 5"/>
+          <p:cNvSpPr/>
+          <p:nvPr/>
+        </p:nvSpPr>
+        <p:spPr>
+          <a:xfrm>
+            <a:off x="548640" y="3657600"/>
+            <a:ext cx="8229600" cy="365760"/>
+          </a:xfrm>
+          <a:prstGeom prst="rect">
+            <a:avLst/>
+          </a:prstGeom>
+          <a:noFill/>
+          <a:ln/>
+        </p:spPr>
+        <p:txBody>
+          <a:bodyPr wrap="square" rtlCol="0" anchor="ctr"/>
+          <a:lstStyle/>
+          <a:p>
+            <a:pPr indent="0" marL="0">
+              <a:buNone/>
+            </a:pPr>
+            <a:r>
+              <a:rPr lang="en-US" sz="1300" dirty="0">
+                <a:solidFill>
+                  <a:srgbClr val="94A3B8"/>
+                </a:solidFill>
+                <a:latin typeface="Calibri" pitchFamily="34" charset="0"/>
+                <a:ea typeface="Calibri" pitchFamily="34" charset="-122"/>
+                <a:cs typeface="Calibri" pitchFamily="34" charset="-120"/>
+              </a:rPr>
+              <a:t>Critère P7 — Benchmark, runtime, resources</a:t>
             </a:r>
             <a:endParaRPr lang="en-US" sz="1300" dirty="0"/>
           </a:p>
         </p:txBody>
+      </p:sp>
+      <p:sp>
+        <p:nvSpPr>
+          <p:cNvPr id="8" name="Shape 6"/>
+          <p:cNvSpPr/>
+          <p:nvPr/>
+        </p:nvSpPr>
+        <p:spPr>
+          <a:xfrm>
+            <a:off x="0" y="5074920"/>
+            <a:ext cx="9144000" cy="73152"/>
+          </a:xfrm>
+          <a:prstGeom prst="rect">
+            <a:avLst/>
+          </a:prstGeom>
+          <a:solidFill>
+            <a:srgbClr val="D97706"/>
+          </a:solidFill>
+          <a:ln/>
+        </p:spPr>
       </p:sp>
     </p:spTree>
   </p:cSld>
@@ -1497,7 +1514,7 @@
     <p:bg>
       <p:bgPr>
         <a:solidFill>
-          <a:srgbClr val="F8FAFC"/>
+          <a:srgbClr val="1A1500"/>
         </a:solidFill>
       </p:bgPr>
     </p:bg>
@@ -1524,13 +1541,13 @@
         <p:spPr>
           <a:xfrm>
             <a:off x="0" y="0"/>
-            <a:ext cx="109728" cy="5143500"/>
+            <a:ext cx="9144000" cy="54864"/>
           </a:xfrm>
           <a:prstGeom prst="rect">
             <a:avLst/>
           </a:prstGeom>
           <a:solidFill>
-            <a:srgbClr val="F97316"/>
+            <a:srgbClr val="D97706"/>
           </a:solidFill>
           <a:ln/>
         </p:spPr>
@@ -1543,7 +1560,7 @@
         </p:nvSpPr>
         <p:spPr>
           <a:xfrm>
-            <a:off x="457200" y="274320"/>
+            <a:off x="548640" y="274320"/>
             <a:ext cx="8229600" cy="548640"/>
           </a:xfrm>
           <a:prstGeom prst="rect">
@@ -1560,17 +1577,17 @@
               <a:buNone/>
             </a:pPr>
             <a:r>
-              <a:rPr lang="en-US" sz="2600" b="1" dirty="0">
-                <a:solidFill>
-                  <a:srgbClr val="1B2A4A"/>
-                </a:solidFill>
-                <a:latin typeface="Trebuchet MS" pitchFamily="34" charset="0"/>
-                <a:ea typeface="Trebuchet MS" pitchFamily="34" charset="-122"/>
-                <a:cs typeface="Trebuchet MS" pitchFamily="34" charset="-120"/>
-              </a:rPr>
-              <a:t>Méthode 1 : Analyse théorique (Big O)</a:t>
-            </a:r>
-            <a:endParaRPr lang="en-US" sz="2600" dirty="0"/>
+              <a:rPr lang="en-US" sz="2400" b="1" dirty="0">
+                <a:solidFill>
+                  <a:srgbClr val="FFFFFF"/>
+                </a:solidFill>
+                <a:latin typeface="Calibri" pitchFamily="34" charset="0"/>
+                <a:ea typeface="Calibri" pitchFamily="34" charset="-122"/>
+                <a:cs typeface="Calibri" pitchFamily="34" charset="-120"/>
+              </a:rPr>
+              <a:t>Deux façons de mesurer l'efficacité</a:t>
+            </a:r>
+            <a:endParaRPr lang="en-US" sz="2400" dirty="0"/>
           </a:p>
         </p:txBody>
       </p:sp>
@@ -1582,8 +1599,8 @@
         </p:nvSpPr>
         <p:spPr>
           <a:xfrm>
-            <a:off x="640080" y="1005840"/>
-            <a:ext cx="7772400" cy="457200"/>
+            <a:off x="548640" y="1005840"/>
+            <a:ext cx="8046720" cy="3657600"/>
           </a:xfrm>
           <a:prstGeom prst="rect">
             <a:avLst/>
@@ -1592,223 +1609,110 @@
           <a:ln/>
         </p:spPr>
         <p:txBody>
-          <a:bodyPr wrap="square" rtlCol="0" anchor="ctr"/>
+          <a:bodyPr wrap="square" rtlCol="0" anchor="t"/>
           <a:lstStyle/>
           <a:p>
             <a:pPr marL="342900" indent="-342900">
+              <a:lnSpc>
+                <a:spcPct val="130000"/>
+              </a:lnSpc>
               <a:buSzPct val="100000"/>
               <a:buChar char="•"/>
             </a:pPr>
             <a:r>
               <a:rPr lang="en-US" sz="1400" dirty="0">
                 <a:solidFill>
-                  <a:srgbClr val="334155"/>
+                  <a:srgbClr val="E2E8F0"/>
                 </a:solidFill>
                 <a:latin typeface="Calibri" pitchFamily="34" charset="0"/>
                 <a:ea typeface="Calibri" pitchFamily="34" charset="-122"/>
                 <a:cs typeface="Calibri" pitchFamily="34" charset="-120"/>
               </a:rPr>
-              <a:t>Compter le nombre d'opérations en fonction de la taille n</a:t>
+              <a:t>1. Analyse THÉORIQUE : Big O (complexité asymptotique)</a:t>
             </a:r>
             <a:endParaRPr lang="en-US" sz="1400" dirty="0"/>
           </a:p>
-        </p:txBody>
-      </p:sp>
-      <p:sp>
-        <p:nvSpPr>
-          <p:cNvPr id="5" name="Text 3"/>
-          <p:cNvSpPr/>
-          <p:nvPr/>
-        </p:nvSpPr>
-        <p:spPr>
-          <a:xfrm>
-            <a:off x="640080" y="1554480"/>
-            <a:ext cx="7772400" cy="457200"/>
-          </a:xfrm>
-          <a:prstGeom prst="rect">
-            <a:avLst/>
-          </a:prstGeom>
-          <a:noFill/>
-          <a:ln/>
-        </p:spPr>
-        <p:txBody>
-          <a:bodyPr wrap="square" rtlCol="0" anchor="ctr"/>
-          <a:lstStyle/>
           <a:p>
             <a:pPr marL="342900" indent="-342900">
+              <a:lnSpc>
+                <a:spcPct val="130000"/>
+              </a:lnSpc>
               <a:buSzPct val="100000"/>
               <a:buChar char="•"/>
             </a:pPr>
             <a:r>
               <a:rPr lang="en-US" sz="1400" dirty="0">
                 <a:solidFill>
-                  <a:srgbClr val="334155"/>
+                  <a:srgbClr val="E2E8F0"/>
                 </a:solidFill>
                 <a:latin typeface="Calibri" pitchFamily="34" charset="0"/>
                 <a:ea typeface="Calibri" pitchFamily="34" charset="-122"/>
                 <a:cs typeface="Calibri" pitchFamily="34" charset="-120"/>
               </a:rPr>
-              <a:t>Avantage : indépendant de la machine, du langage, des données</a:t>
+              <a:t>2. Mesure PRATIQUE : benchmark (temps réel d'exécution)</a:t>
             </a:r>
             <a:endParaRPr lang="en-US" sz="1400" dirty="0"/>
           </a:p>
-        </p:txBody>
-      </p:sp>
-      <p:sp>
-        <p:nvSpPr>
-          <p:cNvPr id="6" name="Text 4"/>
-          <p:cNvSpPr/>
-          <p:nvPr/>
-        </p:nvSpPr>
-        <p:spPr>
-          <a:xfrm>
-            <a:off x="640080" y="2103120"/>
-            <a:ext cx="7772400" cy="457200"/>
-          </a:xfrm>
-          <a:prstGeom prst="rect">
-            <a:avLst/>
-          </a:prstGeom>
-          <a:noFill/>
-          <a:ln/>
-        </p:spPr>
-        <p:txBody>
-          <a:bodyPr wrap="square" rtlCol="0" anchor="ctr"/>
-          <a:lstStyle/>
           <a:p>
             <a:pPr marL="342900" indent="-342900">
+              <a:lnSpc>
+                <a:spcPct val="130000"/>
+              </a:lnSpc>
               <a:buSzPct val="100000"/>
               <a:buChar char="•"/>
             </a:pPr>
             <a:r>
               <a:rPr lang="en-US" sz="1400" dirty="0">
                 <a:solidFill>
-                  <a:srgbClr val="334155"/>
+                  <a:srgbClr val="E2E8F0"/>
                 </a:solidFill>
                 <a:latin typeface="Calibri" pitchFamily="34" charset="0"/>
                 <a:ea typeface="Calibri" pitchFamily="34" charset="-122"/>
                 <a:cs typeface="Calibri" pitchFamily="34" charset="-120"/>
               </a:rPr>
-              <a:t>Exemple : Bubble Sort fait n(n-1)/2 comparaisons → O(n²)</a:t>
+              <a:t>Big O = tendance, Benchmark = temps réel en millisecondes</a:t>
             </a:r>
             <a:endParaRPr lang="en-US" sz="1400" dirty="0"/>
           </a:p>
-        </p:txBody>
-      </p:sp>
-      <p:sp>
-        <p:nvSpPr>
-          <p:cNvPr id="7" name="Text 5"/>
-          <p:cNvSpPr/>
-          <p:nvPr/>
-        </p:nvSpPr>
-        <p:spPr>
-          <a:xfrm>
-            <a:off x="640080" y="2651760"/>
-            <a:ext cx="7772400" cy="457200"/>
-          </a:xfrm>
-          <a:prstGeom prst="rect">
-            <a:avLst/>
-          </a:prstGeom>
-          <a:noFill/>
-          <a:ln/>
-        </p:spPr>
-        <p:txBody>
-          <a:bodyPr wrap="square" rtlCol="0" anchor="ctr"/>
-          <a:lstStyle/>
           <a:p>
             <a:pPr marL="342900" indent="-342900">
+              <a:lnSpc>
+                <a:spcPct val="130000"/>
+              </a:lnSpc>
               <a:buSzPct val="100000"/>
               <a:buChar char="•"/>
             </a:pPr>
             <a:r>
               <a:rPr lang="en-US" sz="1400" dirty="0">
                 <a:solidFill>
-                  <a:srgbClr val="334155"/>
+                  <a:srgbClr val="E2E8F0"/>
                 </a:solidFill>
                 <a:latin typeface="Calibri" pitchFamily="34" charset="0"/>
                 <a:ea typeface="Calibri" pitchFamily="34" charset="-122"/>
                 <a:cs typeface="Calibri" pitchFamily="34" charset="-120"/>
               </a:rPr>
-              <a:t>Inconvénient : ignore les constantes et le comportement réel</a:t>
+              <a:t>Les deux sont complémentaires</a:t>
             </a:r>
             <a:endParaRPr lang="en-US" sz="1400" dirty="0"/>
           </a:p>
-        </p:txBody>
-      </p:sp>
-      <p:sp>
-        <p:nvSpPr>
-          <p:cNvPr id="8" name="Text 6"/>
-          <p:cNvSpPr/>
-          <p:nvPr/>
-        </p:nvSpPr>
-        <p:spPr>
-          <a:xfrm>
-            <a:off x="640080" y="3200400"/>
-            <a:ext cx="7772400" cy="457200"/>
-          </a:xfrm>
-          <a:prstGeom prst="rect">
-            <a:avLst/>
-          </a:prstGeom>
-          <a:noFill/>
-          <a:ln/>
-        </p:spPr>
-        <p:txBody>
-          <a:bodyPr wrap="square" rtlCol="0" anchor="ctr"/>
-          <a:lstStyle/>
           <a:p>
             <a:pPr marL="342900" indent="-342900">
+              <a:lnSpc>
+                <a:spcPct val="130000"/>
+              </a:lnSpc>
               <a:buSzPct val="100000"/>
               <a:buChar char="•"/>
             </a:pPr>
             <a:r>
               <a:rPr lang="en-US" sz="1400" dirty="0">
                 <a:solidFill>
-                  <a:srgbClr val="334155"/>
+                  <a:srgbClr val="E2E8F0"/>
                 </a:solidFill>
                 <a:latin typeface="Calibri" pitchFamily="34" charset="0"/>
                 <a:ea typeface="Calibri" pitchFamily="34" charset="-122"/>
                 <a:cs typeface="Calibri" pitchFamily="34" charset="-120"/>
               </a:rPr>
-              <a:t>Méthode : identifier les boucles, compter les itérations, simplifier</a:t>
-            </a:r>
-            <a:endParaRPr lang="en-US" sz="1400" dirty="0"/>
-          </a:p>
-        </p:txBody>
-      </p:sp>
-      <p:sp>
-        <p:nvSpPr>
-          <p:cNvPr id="9" name="Text 7"/>
-          <p:cNvSpPr/>
-          <p:nvPr/>
-        </p:nvSpPr>
-        <p:spPr>
-          <a:xfrm>
-            <a:off x="640080" y="3749040"/>
-            <a:ext cx="7772400" cy="457200"/>
-          </a:xfrm>
-          <a:prstGeom prst="rect">
-            <a:avLst/>
-          </a:prstGeom>
-          <a:noFill/>
-          <a:ln/>
-        </p:spPr>
-        <p:txBody>
-          <a:bodyPr wrap="square" rtlCol="0" anchor="ctr"/>
-          <a:lstStyle/>
-          <a:p>
-            <a:pPr marL="342900" indent="-342900">
-              <a:buSzPct val="100000"/>
-              <a:buChar char="•"/>
-            </a:pPr>
-            <a:r>
-              <a:rPr lang="en-US" sz="1400" dirty="0">
-                <a:solidFill>
-                  <a:srgbClr val="334155"/>
-                </a:solidFill>
-                <a:latin typeface="Calibri" pitchFamily="34" charset="0"/>
-                <a:ea typeface="Calibri" pitchFamily="34" charset="-122"/>
-                <a:cs typeface="Calibri" pitchFamily="34" charset="-120"/>
-              </a:rPr>
-              <a:t>C'est l'analyse THÉORIQUE — ce que l'algorithme DEVRAIT faire</a:t>
+              <a:t>Big O pour comparer des familles, Benchmark pour choisir dans la même famille</a:t>
             </a:r>
             <a:endParaRPr lang="en-US" sz="1400" dirty="0"/>
           </a:p>
@@ -1828,7 +1732,7 @@
     <p:bg>
       <p:bgPr>
         <a:solidFill>
-          <a:srgbClr val="F8FAFC"/>
+          <a:srgbClr val="1A1500"/>
         </a:solidFill>
       </p:bgPr>
     </p:bg>
@@ -1855,13 +1759,13 @@
         <p:spPr>
           <a:xfrm>
             <a:off x="0" y="0"/>
-            <a:ext cx="109728" cy="5143500"/>
+            <a:ext cx="9144000" cy="54864"/>
           </a:xfrm>
           <a:prstGeom prst="rect">
             <a:avLst/>
           </a:prstGeom>
           <a:solidFill>
-            <a:srgbClr val="F97316"/>
+            <a:srgbClr val="D97706"/>
           </a:solidFill>
           <a:ln/>
         </p:spPr>
@@ -1874,7 +1778,7 @@
         </p:nvSpPr>
         <p:spPr>
           <a:xfrm>
-            <a:off x="457200" y="274320"/>
+            <a:off x="548640" y="274320"/>
             <a:ext cx="8229600" cy="548640"/>
           </a:xfrm>
           <a:prstGeom prst="rect">
@@ -1891,17 +1795,17 @@
               <a:buNone/>
             </a:pPr>
             <a:r>
-              <a:rPr lang="en-US" sz="2600" b="1" dirty="0">
-                <a:solidFill>
-                  <a:srgbClr val="1B2A4A"/>
-                </a:solidFill>
-                <a:latin typeface="Trebuchet MS" pitchFamily="34" charset="0"/>
-                <a:ea typeface="Trebuchet MS" pitchFamily="34" charset="-122"/>
-                <a:cs typeface="Trebuchet MS" pitchFamily="34" charset="-120"/>
-              </a:rPr>
-              <a:t>Méthode 2 : Mesure empirique (benchmark)</a:t>
-            </a:r>
-            <a:endParaRPr lang="en-US" sz="2600" dirty="0"/>
+              <a:rPr lang="en-US" sz="2400" b="1" dirty="0">
+                <a:solidFill>
+                  <a:srgbClr val="FFFFFF"/>
+                </a:solidFill>
+                <a:latin typeface="Calibri" pitchFamily="34" charset="0"/>
+                <a:ea typeface="Calibri" pitchFamily="34" charset="-122"/>
+                <a:cs typeface="Calibri" pitchFamily="34" charset="-120"/>
+              </a:rPr>
+              <a:t>Benchmark en Java</a:t>
+            </a:r>
+            <a:endParaRPr lang="en-US" sz="2400" dirty="0"/>
           </a:p>
         </p:txBody>
       </p:sp>
@@ -1913,8 +1817,8 @@
         </p:nvSpPr>
         <p:spPr>
           <a:xfrm>
-            <a:off x="640080" y="1005840"/>
-            <a:ext cx="7772400" cy="457200"/>
+            <a:off x="548640" y="1005840"/>
+            <a:ext cx="3840480" cy="3200400"/>
           </a:xfrm>
           <a:prstGeom prst="rect">
             <a:avLst/>
@@ -1923,7 +1827,7 @@
           <a:ln/>
         </p:spPr>
         <p:txBody>
-          <a:bodyPr wrap="square" rtlCol="0" anchor="ctr"/>
+          <a:bodyPr wrap="square" rtlCol="0" anchor="t"/>
           <a:lstStyle/>
           <a:p>
             <a:pPr marL="342900" indent="-342900">
@@ -1931,59 +1835,113 @@
               <a:buChar char="•"/>
             </a:pPr>
             <a:r>
-              <a:rPr lang="en-US" sz="1400" dirty="0">
-                <a:solidFill>
-                  <a:srgbClr val="334155"/>
+              <a:rPr lang="en-US" sz="1300" dirty="0">
+                <a:solidFill>
+                  <a:srgbClr val="E2E8F0"/>
                 </a:solidFill>
                 <a:latin typeface="Calibri" pitchFamily="34" charset="0"/>
                 <a:ea typeface="Calibri" pitchFamily="34" charset="-122"/>
                 <a:cs typeface="Calibri" pitchFamily="34" charset="-120"/>
               </a:rPr>
-              <a:t>Exécuter l'algorithme et MESURER le temps réel avec System.nanoTime()</a:t>
-            </a:r>
-            <a:endParaRPr lang="en-US" sz="1400" dirty="0"/>
-          </a:p>
-        </p:txBody>
-      </p:sp>
-      <p:sp>
-        <p:nvSpPr>
-          <p:cNvPr id="5" name="Text 3"/>
-          <p:cNvSpPr/>
-          <p:nvPr/>
-        </p:nvSpPr>
-        <p:spPr>
-          <a:xfrm>
-            <a:off x="640080" y="1554480"/>
-            <a:ext cx="7772400" cy="457200"/>
-          </a:xfrm>
-          <a:prstGeom prst="rect">
-            <a:avLst/>
-          </a:prstGeom>
-          <a:noFill/>
-          <a:ln/>
-        </p:spPr>
-        <p:txBody>
-          <a:bodyPr wrap="square" rtlCol="0" anchor="ctr"/>
-          <a:lstStyle/>
+              <a:t>System.nanoTime() : mesurer le temps avant/après</a:t>
+            </a:r>
+            <a:endParaRPr lang="en-US" sz="1300" dirty="0"/>
+          </a:p>
           <a:p>
             <a:pPr marL="342900" indent="-342900">
               <a:buSzPct val="100000"/>
               <a:buChar char="•"/>
             </a:pPr>
             <a:r>
-              <a:rPr lang="en-US" sz="1400" dirty="0">
-                <a:solidFill>
-                  <a:srgbClr val="334155"/>
+              <a:rPr lang="en-US" sz="1300" dirty="0">
+                <a:solidFill>
+                  <a:srgbClr val="E2E8F0"/>
                 </a:solidFill>
                 <a:latin typeface="Calibri" pitchFamily="34" charset="0"/>
                 <a:ea typeface="Calibri" pitchFamily="34" charset="-122"/>
                 <a:cs typeface="Calibri" pitchFamily="34" charset="-120"/>
               </a:rPr>
-              <a:t>Avantage : reflète la performance RÉELLE sur une machine donnée</a:t>
-            </a:r>
-            <a:endParaRPr lang="en-US" sz="1400" dirty="0"/>
-          </a:p>
-        </p:txBody>
+              <a:t>Attention : le JIT compiler optimise → warm-up nécessaire</a:t>
+            </a:r>
+            <a:endParaRPr lang="en-US" sz="1300" dirty="0"/>
+          </a:p>
+          <a:p>
+            <a:pPr marL="342900" indent="-342900">
+              <a:buSzPct val="100000"/>
+              <a:buChar char="•"/>
+            </a:pPr>
+            <a:r>
+              <a:rPr lang="en-US" sz="1300" dirty="0">
+                <a:solidFill>
+                  <a:srgbClr val="E2E8F0"/>
+                </a:solidFill>
+                <a:latin typeface="Calibri" pitchFamily="34" charset="0"/>
+                <a:ea typeface="Calibri" pitchFamily="34" charset="-122"/>
+                <a:cs typeface="Calibri" pitchFamily="34" charset="-120"/>
+              </a:rPr>
+              <a:t>Mesurer PLUSIEURS fois et faire la moyenne</a:t>
+            </a:r>
+            <a:endParaRPr lang="en-US" sz="1300" dirty="0"/>
+          </a:p>
+          <a:p>
+            <a:pPr marL="342900" indent="-342900">
+              <a:buSzPct val="100000"/>
+              <a:buChar char="•"/>
+            </a:pPr>
+            <a:r>
+              <a:rPr lang="en-US" sz="1300" dirty="0">
+                <a:solidFill>
+                  <a:srgbClr val="E2E8F0"/>
+                </a:solidFill>
+                <a:latin typeface="Calibri" pitchFamily="34" charset="0"/>
+                <a:ea typeface="Calibri" pitchFamily="34" charset="-122"/>
+                <a:cs typeface="Calibri" pitchFamily="34" charset="-120"/>
+              </a:rPr>
+              <a:t>Utiliser JMH (Java Microbenchmark Harness) pour la précision</a:t>
+            </a:r>
+            <a:endParaRPr lang="en-US" sz="1300" dirty="0"/>
+          </a:p>
+          <a:p>
+            <a:pPr marL="342900" indent="-342900">
+              <a:buSzPct val="100000"/>
+              <a:buChar char="•"/>
+            </a:pPr>
+            <a:r>
+              <a:rPr lang="en-US" sz="1300" dirty="0">
+                <a:solidFill>
+                  <a:srgbClr val="E2E8F0"/>
+                </a:solidFill>
+                <a:latin typeface="Calibri" pitchFamily="34" charset="0"/>
+                <a:ea typeface="Calibri" pitchFamily="34" charset="-122"/>
+                <a:cs typeface="Calibri" pitchFamily="34" charset="-120"/>
+              </a:rPr>
+              <a:t>Mesurer aussi la MÉMOIRE : Runtime.getRuntime().totalMemory()</a:t>
+            </a:r>
+            <a:endParaRPr lang="en-US" sz="1300" dirty="0"/>
+          </a:p>
+        </p:txBody>
+      </p:sp>
+      <p:sp>
+        <p:nvSpPr>
+          <p:cNvPr id="5" name="Shape 3"/>
+          <p:cNvSpPr/>
+          <p:nvPr/>
+        </p:nvSpPr>
+        <p:spPr>
+          <a:xfrm>
+            <a:off x="4754880" y="1005840"/>
+            <a:ext cx="4023360" cy="3200400"/>
+          </a:xfrm>
+          <a:prstGeom prst="roundRect">
+            <a:avLst>
+              <a:gd name="adj" fmla="val 2857"/>
+            </a:avLst>
+          </a:prstGeom>
+          <a:solidFill>
+            <a:srgbClr val="0D1117"/>
+          </a:solidFill>
+          <a:ln/>
+        </p:spPr>
       </p:sp>
       <p:sp>
         <p:nvSpPr>
@@ -1993,8 +1951,8 @@
         </p:nvSpPr>
         <p:spPr>
           <a:xfrm>
-            <a:off x="640080" y="2103120"/>
-            <a:ext cx="7772400" cy="457200"/>
+            <a:off x="4937760" y="1143000"/>
+            <a:ext cx="3657600" cy="2926080"/>
           </a:xfrm>
           <a:prstGeom prst="rect">
             <a:avLst/>
@@ -2003,145 +1961,195 @@
           <a:ln/>
         </p:spPr>
         <p:txBody>
-          <a:bodyPr wrap="square" rtlCol="0" anchor="ctr"/>
-          <a:lstStyle/>
-          <a:p>
-            <a:pPr marL="342900" indent="-342900">
-              <a:buSzPct val="100000"/>
-              <a:buChar char="•"/>
-            </a:pPr>
-            <a:r>
-              <a:rPr lang="en-US" sz="1400" dirty="0">
-                <a:solidFill>
-                  <a:srgbClr val="334155"/>
-                </a:solidFill>
-                <a:latin typeface="Calibri" pitchFamily="34" charset="0"/>
-                <a:ea typeface="Calibri" pitchFamily="34" charset="-122"/>
-                <a:cs typeface="Calibri" pitchFamily="34" charset="-120"/>
-              </a:rPr>
-              <a:t>Inconvénient : dépend de la machine, du système, de la charge CPU</a:t>
-            </a:r>
-            <a:endParaRPr lang="en-US" sz="1400" dirty="0"/>
-          </a:p>
-        </p:txBody>
-      </p:sp>
-      <p:sp>
-        <p:nvSpPr>
-          <p:cNvPr id="7" name="Text 5"/>
-          <p:cNvSpPr/>
-          <p:nvPr/>
-        </p:nvSpPr>
-        <p:spPr>
-          <a:xfrm>
-            <a:off x="640080" y="2651760"/>
-            <a:ext cx="7772400" cy="457200"/>
-          </a:xfrm>
-          <a:prstGeom prst="rect">
-            <a:avLst/>
-          </a:prstGeom>
-          <a:noFill/>
-          <a:ln/>
-        </p:spPr>
-        <p:txBody>
-          <a:bodyPr wrap="square" rtlCol="0" anchor="ctr"/>
-          <a:lstStyle/>
-          <a:p>
-            <a:pPr marL="342900" indent="-342900">
-              <a:buSzPct val="100000"/>
-              <a:buChar char="•"/>
-            </a:pPr>
-            <a:r>
-              <a:rPr lang="en-US" sz="1400" dirty="0">
-                <a:solidFill>
-                  <a:srgbClr val="334155"/>
-                </a:solidFill>
-                <a:latin typeface="Calibri" pitchFamily="34" charset="0"/>
-                <a:ea typeface="Calibri" pitchFamily="34" charset="-122"/>
-                <a:cs typeface="Calibri" pitchFamily="34" charset="-120"/>
-              </a:rPr>
-              <a:t>Bonnes pratiques : exécuter PLUSIEURS fois, faire la MOYENNE, varier n</a:t>
-            </a:r>
-            <a:endParaRPr lang="en-US" sz="1400" dirty="0"/>
-          </a:p>
-        </p:txBody>
-      </p:sp>
-      <p:sp>
-        <p:nvSpPr>
-          <p:cNvPr id="8" name="Text 6"/>
-          <p:cNvSpPr/>
-          <p:nvPr/>
-        </p:nvSpPr>
-        <p:spPr>
-          <a:xfrm>
-            <a:off x="640080" y="3200400"/>
-            <a:ext cx="7772400" cy="457200"/>
-          </a:xfrm>
-          <a:prstGeom prst="rect">
-            <a:avLst/>
-          </a:prstGeom>
-          <a:noFill/>
-          <a:ln/>
-        </p:spPr>
-        <p:txBody>
-          <a:bodyPr wrap="square" rtlCol="0" anchor="ctr"/>
-          <a:lstStyle/>
-          <a:p>
-            <a:pPr marL="342900" indent="-342900">
-              <a:buSzPct val="100000"/>
-              <a:buChar char="•"/>
-            </a:pPr>
-            <a:r>
-              <a:rPr lang="en-US" sz="1400" dirty="0">
-                <a:solidFill>
-                  <a:srgbClr val="334155"/>
-                </a:solidFill>
-                <a:latin typeface="Calibri" pitchFamily="34" charset="0"/>
-                <a:ea typeface="Calibri" pitchFamily="34" charset="-122"/>
-                <a:cs typeface="Calibri" pitchFamily="34" charset="-120"/>
-              </a:rPr>
-              <a:t>Mesurer aussi la MÉMOIRE avec Runtime.getRuntime().totalMemory() - freeMemory()</a:t>
-            </a:r>
-            <a:endParaRPr lang="en-US" sz="1400" dirty="0"/>
-          </a:p>
-        </p:txBody>
-      </p:sp>
-      <p:sp>
-        <p:nvSpPr>
-          <p:cNvPr id="9" name="Text 7"/>
-          <p:cNvSpPr/>
-          <p:nvPr/>
-        </p:nvSpPr>
-        <p:spPr>
-          <a:xfrm>
-            <a:off x="640080" y="3749040"/>
-            <a:ext cx="7772400" cy="457200"/>
-          </a:xfrm>
-          <a:prstGeom prst="rect">
-            <a:avLst/>
-          </a:prstGeom>
-          <a:noFill/>
-          <a:ln/>
-        </p:spPr>
-        <p:txBody>
-          <a:bodyPr wrap="square" rtlCol="0" anchor="ctr"/>
-          <a:lstStyle/>
-          <a:p>
-            <a:pPr marL="342900" indent="-342900">
-              <a:buSzPct val="100000"/>
-              <a:buChar char="•"/>
-            </a:pPr>
-            <a:r>
-              <a:rPr lang="en-US" sz="1400" dirty="0">
-                <a:solidFill>
-                  <a:srgbClr val="334155"/>
-                </a:solidFill>
-                <a:latin typeface="Calibri" pitchFamily="34" charset="0"/>
-                <a:ea typeface="Calibri" pitchFamily="34" charset="-122"/>
-                <a:cs typeface="Calibri" pitchFamily="34" charset="-120"/>
-              </a:rPr>
-              <a:t>C'est l'analyse EMPIRIQUE — ce que l'algorithme FAIT réellement</a:t>
-            </a:r>
-            <a:endParaRPr lang="en-US" sz="1400" dirty="0"/>
+          <a:bodyPr wrap="square" rtlCol="0" anchor="t"/>
+          <a:lstStyle/>
+          <a:p>
+            <a:pPr indent="0" marL="0">
+              <a:buNone/>
+            </a:pPr>
+            <a:r>
+              <a:rPr lang="en-US" sz="1000" dirty="0">
+                <a:solidFill>
+                  <a:srgbClr val="A5F3FC"/>
+                </a:solidFill>
+                <a:latin typeface="Consolas" pitchFamily="34" charset="0"/>
+                <a:ea typeface="Consolas" pitchFamily="34" charset="-122"/>
+                <a:cs typeface="Consolas" pitchFamily="34" charset="-120"/>
+              </a:rPr>
+              <a:t>long start = System.nanoTime();</a:t>
+            </a:r>
+            <a:endParaRPr lang="en-US" sz="1000" dirty="0"/>
+          </a:p>
+          <a:p>
+            <a:pPr indent="0" marL="0">
+              <a:buNone/>
+            </a:pPr>
+            <a:endParaRPr lang="en-US" sz="1000" dirty="0"/>
+          </a:p>
+          <a:p>
+            <a:pPr indent="0" marL="0">
+              <a:buNone/>
+            </a:pPr>
+            <a:r>
+              <a:rPr lang="en-US" sz="1000" dirty="0">
+                <a:solidFill>
+                  <a:srgbClr val="A5F3FC"/>
+                </a:solidFill>
+                <a:latin typeface="Consolas" pitchFamily="34" charset="0"/>
+                <a:ea typeface="Consolas" pitchFamily="34" charset="-122"/>
+                <a:cs typeface="Consolas" pitchFamily="34" charset="-120"/>
+              </a:rPr>
+              <a:t>// Algorithme à mesurer</a:t>
+            </a:r>
+            <a:endParaRPr lang="en-US" sz="1000" dirty="0"/>
+          </a:p>
+          <a:p>
+            <a:pPr indent="0" marL="0">
+              <a:buNone/>
+            </a:pPr>
+            <a:r>
+              <a:rPr lang="en-US" sz="1000" dirty="0">
+                <a:solidFill>
+                  <a:srgbClr val="A5F3FC"/>
+                </a:solidFill>
+                <a:latin typeface="Consolas" pitchFamily="34" charset="0"/>
+                <a:ea typeface="Consolas" pitchFamily="34" charset="-122"/>
+                <a:cs typeface="Consolas" pitchFamily="34" charset="-120"/>
+              </a:rPr>
+              <a:t>for (int i = 0; i &lt; n; i++)</a:t>
+            </a:r>
+            <a:endParaRPr lang="en-US" sz="1000" dirty="0"/>
+          </a:p>
+          <a:p>
+            <a:pPr indent="0" marL="0">
+              <a:buNone/>
+            </a:pPr>
+            <a:r>
+              <a:rPr lang="en-US" sz="1000" dirty="0">
+                <a:solidFill>
+                  <a:srgbClr val="A5F3FC"/>
+                </a:solidFill>
+                <a:latin typeface="Consolas" pitchFamily="34" charset="0"/>
+                <a:ea typeface="Consolas" pitchFamily="34" charset="-122"/>
+                <a:cs typeface="Consolas" pitchFamily="34" charset="-120"/>
+              </a:rPr>
+              <a:t>    list.get(i);</a:t>
+            </a:r>
+            <a:endParaRPr lang="en-US" sz="1000" dirty="0"/>
+          </a:p>
+          <a:p>
+            <a:pPr indent="0" marL="0">
+              <a:buNone/>
+            </a:pPr>
+            <a:endParaRPr lang="en-US" sz="1000" dirty="0"/>
+          </a:p>
+          <a:p>
+            <a:pPr indent="0" marL="0">
+              <a:buNone/>
+            </a:pPr>
+            <a:r>
+              <a:rPr lang="en-US" sz="1000" dirty="0">
+                <a:solidFill>
+                  <a:srgbClr val="A5F3FC"/>
+                </a:solidFill>
+                <a:latin typeface="Consolas" pitchFamily="34" charset="0"/>
+                <a:ea typeface="Consolas" pitchFamily="34" charset="-122"/>
+                <a:cs typeface="Consolas" pitchFamily="34" charset="-120"/>
+              </a:rPr>
+              <a:t>long end = System.nanoTime();</a:t>
+            </a:r>
+            <a:endParaRPr lang="en-US" sz="1000" dirty="0"/>
+          </a:p>
+          <a:p>
+            <a:pPr indent="0" marL="0">
+              <a:buNone/>
+            </a:pPr>
+            <a:r>
+              <a:rPr lang="en-US" sz="1000" dirty="0">
+                <a:solidFill>
+                  <a:srgbClr val="A5F3FC"/>
+                </a:solidFill>
+                <a:latin typeface="Consolas" pitchFamily="34" charset="0"/>
+                <a:ea typeface="Consolas" pitchFamily="34" charset="-122"/>
+                <a:cs typeface="Consolas" pitchFamily="34" charset="-120"/>
+              </a:rPr>
+              <a:t>long ms = (end - start) / 1_000_000;</a:t>
+            </a:r>
+            <a:endParaRPr lang="en-US" sz="1000" dirty="0"/>
+          </a:p>
+          <a:p>
+            <a:pPr indent="0" marL="0">
+              <a:buNone/>
+            </a:pPr>
+            <a:r>
+              <a:rPr lang="en-US" sz="1000" dirty="0">
+                <a:solidFill>
+                  <a:srgbClr val="A5F3FC"/>
+                </a:solidFill>
+                <a:latin typeface="Consolas" pitchFamily="34" charset="0"/>
+                <a:ea typeface="Consolas" pitchFamily="34" charset="-122"/>
+                <a:cs typeface="Consolas" pitchFamily="34" charset="-120"/>
+              </a:rPr>
+              <a:t>System.out.println(ms + " ms");</a:t>
+            </a:r>
+            <a:endParaRPr lang="en-US" sz="1000" dirty="0"/>
+          </a:p>
+          <a:p>
+            <a:pPr indent="0" marL="0">
+              <a:buNone/>
+            </a:pPr>
+            <a:endParaRPr lang="en-US" sz="1000" dirty="0"/>
+          </a:p>
+          <a:p>
+            <a:pPr indent="0" marL="0">
+              <a:buNone/>
+            </a:pPr>
+            <a:r>
+              <a:rPr lang="en-US" sz="1000" dirty="0">
+                <a:solidFill>
+                  <a:srgbClr val="A5F3FC"/>
+                </a:solidFill>
+                <a:latin typeface="Consolas" pitchFamily="34" charset="0"/>
+                <a:ea typeface="Consolas" pitchFamily="34" charset="-122"/>
+                <a:cs typeface="Consolas" pitchFamily="34" charset="-120"/>
+              </a:rPr>
+              <a:t>// Mémoire</a:t>
+            </a:r>
+            <a:endParaRPr lang="en-US" sz="1000" dirty="0"/>
+          </a:p>
+          <a:p>
+            <a:pPr indent="0" marL="0">
+              <a:buNone/>
+            </a:pPr>
+            <a:r>
+              <a:rPr lang="en-US" sz="1000" dirty="0">
+                <a:solidFill>
+                  <a:srgbClr val="A5F3FC"/>
+                </a:solidFill>
+                <a:latin typeface="Consolas" pitchFamily="34" charset="0"/>
+                <a:ea typeface="Consolas" pitchFamily="34" charset="-122"/>
+                <a:cs typeface="Consolas" pitchFamily="34" charset="-120"/>
+              </a:rPr>
+              <a:t>Runtime rt = Runtime.getRuntime();</a:t>
+            </a:r>
+            <a:endParaRPr lang="en-US" sz="1000" dirty="0"/>
+          </a:p>
+          <a:p>
+            <a:pPr indent="0" marL="0">
+              <a:buNone/>
+            </a:pPr>
+            <a:r>
+              <a:rPr lang="en-US" sz="1000" dirty="0">
+                <a:solidFill>
+                  <a:srgbClr val="A5F3FC"/>
+                </a:solidFill>
+                <a:latin typeface="Consolas" pitchFamily="34" charset="0"/>
+                <a:ea typeface="Consolas" pitchFamily="34" charset="-122"/>
+                <a:cs typeface="Consolas" pitchFamily="34" charset="-120"/>
+              </a:rPr>
+              <a:t>long mem = rt.totalMemory() - rt.freeMemory();</a:t>
+            </a:r>
+            <a:endParaRPr lang="en-US" sz="1000" dirty="0"/>
           </a:p>
         </p:txBody>
       </p:sp>
@@ -2159,7 +2167,7 @@
     <p:bg>
       <p:bgPr>
         <a:solidFill>
-          <a:srgbClr val="F8FAFC"/>
+          <a:srgbClr val="1A1500"/>
         </a:solidFill>
       </p:bgPr>
     </p:bg>
@@ -2186,13 +2194,13 @@
         <p:spPr>
           <a:xfrm>
             <a:off x="0" y="0"/>
-            <a:ext cx="109728" cy="5143500"/>
+            <a:ext cx="9144000" cy="54864"/>
           </a:xfrm>
           <a:prstGeom prst="rect">
             <a:avLst/>
           </a:prstGeom>
           <a:solidFill>
-            <a:srgbClr val="F97316"/>
+            <a:srgbClr val="D97706"/>
           </a:solidFill>
           <a:ln/>
         </p:spPr>
@@ -2205,8 +2213,8 @@
         </p:nvSpPr>
         <p:spPr>
           <a:xfrm>
-            <a:off x="457200" y="274320"/>
-            <a:ext cx="8229600" cy="457200"/>
+            <a:off x="548640" y="274320"/>
+            <a:ext cx="8229600" cy="548640"/>
           </a:xfrm>
           <a:prstGeom prst="rect">
             <a:avLst/>
@@ -2222,50 +2230,30 @@
               <a:buNone/>
             </a:pPr>
             <a:r>
-              <a:rPr lang="en-US" sz="2600" b="1" dirty="0">
-                <a:solidFill>
-                  <a:srgbClr val="1B2A4A"/>
-                </a:solidFill>
-                <a:latin typeface="Trebuchet MS" pitchFamily="34" charset="0"/>
-                <a:ea typeface="Trebuchet MS" pitchFamily="34" charset="-122"/>
-                <a:cs typeface="Trebuchet MS" pitchFamily="34" charset="-120"/>
-              </a:rPr>
-              <a:t>Benchmark Java : template</a:t>
-            </a:r>
-            <a:endParaRPr lang="en-US" sz="2600" dirty="0"/>
-          </a:p>
-        </p:txBody>
-      </p:sp>
-      <p:sp>
-        <p:nvSpPr>
-          <p:cNvPr id="4" name="Shape 2"/>
+              <a:rPr lang="en-US" sz="2400" b="1" dirty="0">
+                <a:solidFill>
+                  <a:srgbClr val="FFFFFF"/>
+                </a:solidFill>
+                <a:latin typeface="Calibri" pitchFamily="34" charset="0"/>
+                <a:ea typeface="Calibri" pitchFamily="34" charset="-122"/>
+                <a:cs typeface="Calibri" pitchFamily="34" charset="-120"/>
+              </a:rPr>
+              <a:t>Facteurs affectant l'efficacité</a:t>
+            </a:r>
+            <a:endParaRPr lang="en-US" sz="2400" dirty="0"/>
+          </a:p>
+        </p:txBody>
+      </p:sp>
+      <p:sp>
+        <p:nvSpPr>
+          <p:cNvPr id="4" name="Text 2"/>
           <p:cNvSpPr/>
           <p:nvPr/>
         </p:nvSpPr>
         <p:spPr>
           <a:xfrm>
-            <a:off x="457200" y="822960"/>
-            <a:ext cx="8229600" cy="3840480"/>
-          </a:xfrm>
-          <a:prstGeom prst="rect">
-            <a:avLst/>
-          </a:prstGeom>
-          <a:solidFill>
-            <a:srgbClr val="1E293B"/>
-          </a:solidFill>
-          <a:ln/>
-        </p:spPr>
-      </p:sp>
-      <p:sp>
-        <p:nvSpPr>
-          <p:cNvPr id="5" name="Text 3"/>
-          <p:cNvSpPr/>
-          <p:nvPr/>
-        </p:nvSpPr>
-        <p:spPr>
-          <a:xfrm>
-            <a:off x="640080" y="914400"/>
-            <a:ext cx="7863840" cy="3657600"/>
+            <a:off x="548640" y="1005840"/>
+            <a:ext cx="8046720" cy="3657600"/>
           </a:xfrm>
           <a:prstGeom prst="rect">
             <a:avLst/>
@@ -2274,449 +2262,133 @@
           <a:ln/>
         </p:spPr>
         <p:txBody>
-          <a:bodyPr wrap="square" rtlCol="0" anchor="ctr"/>
-          <a:lstStyle/>
-          <a:p>
-            <a:pPr indent="0" marL="0">
-              <a:buNone/>
-            </a:pPr>
-            <a:r>
-              <a:rPr lang="en-US" sz="1100" dirty="0">
-                <a:solidFill>
-                  <a:srgbClr val="7C3AED"/>
-                </a:solidFill>
-                <a:latin typeface="Consolas" pitchFamily="34" charset="0"/>
-                <a:ea typeface="Consolas" pitchFamily="34" charset="-122"/>
-                <a:cs typeface="Consolas" pitchFamily="34" charset="-120"/>
-              </a:rPr>
-              <a:t>public class MesurerEfficacite {</a:t>
-            </a:r>
-            <a:endParaRPr lang="en-US" sz="1100" dirty="0"/>
-          </a:p>
-          <a:p>
-            <a:pPr indent="0" marL="0">
-              <a:buNone/>
-            </a:pPr>
-            <a:r>
-              <a:rPr lang="en-US" sz="1100" dirty="0">
-                <a:solidFill>
-                  <a:srgbClr val="7C3AED"/>
-                </a:solidFill>
-                <a:latin typeface="Consolas" pitchFamily="34" charset="0"/>
-                <a:ea typeface="Consolas" pitchFamily="34" charset="-122"/>
-                <a:cs typeface="Consolas" pitchFamily="34" charset="-120"/>
-              </a:rPr>
-              <a:t>    public static void main(String[] args) {</a:t>
-            </a:r>
-            <a:endParaRPr lang="en-US" sz="1100" dirty="0"/>
-          </a:p>
-          <a:p>
-            <a:pPr indent="0" marL="0">
-              <a:buNone/>
-            </a:pPr>
-            <a:r>
-              <a:rPr lang="en-US" sz="1100" dirty="0">
+          <a:bodyPr wrap="square" rtlCol="0" anchor="t"/>
+          <a:lstStyle/>
+          <a:p>
+            <a:pPr marL="342900" indent="-342900">
+              <a:lnSpc>
+                <a:spcPct val="130000"/>
+              </a:lnSpc>
+              <a:buSzPct val="100000"/>
+              <a:buChar char="•"/>
+            </a:pPr>
+            <a:r>
+              <a:rPr lang="en-US" sz="1400" dirty="0">
                 <a:solidFill>
                   <a:srgbClr val="E2E8F0"/>
                 </a:solidFill>
-                <a:latin typeface="Consolas" pitchFamily="34" charset="0"/>
-                <a:ea typeface="Consolas" pitchFamily="34" charset="-122"/>
-                <a:cs typeface="Consolas" pitchFamily="34" charset="-120"/>
-              </a:rPr>
-              <a:t>        int[] tailles = {1000, 5000, 10000, 50000, 100000};</a:t>
-            </a:r>
-            <a:endParaRPr lang="en-US" sz="1100" dirty="0"/>
-          </a:p>
-          <a:p>
-            <a:pPr indent="0" marL="0">
-              <a:buNone/>
-            </a:pPr>
-            <a:r>
-              <a:rPr lang="en-US" sz="1100" dirty="0">
+                <a:latin typeface="Calibri" pitchFamily="34" charset="0"/>
+                <a:ea typeface="Calibri" pitchFamily="34" charset="-122"/>
+                <a:cs typeface="Calibri" pitchFamily="34" charset="-120"/>
+              </a:rPr>
+              <a:t>Complexité algorithmique : le facteur PRINCIPAL</a:t>
+            </a:r>
+            <a:endParaRPr lang="en-US" sz="1400" dirty="0"/>
+          </a:p>
+          <a:p>
+            <a:pPr marL="342900" indent="-342900">
+              <a:lnSpc>
+                <a:spcPct val="130000"/>
+              </a:lnSpc>
+              <a:buSzPct val="100000"/>
+              <a:buChar char="•"/>
+            </a:pPr>
+            <a:r>
+              <a:rPr lang="en-US" sz="1400" dirty="0">
                 <a:solidFill>
                   <a:srgbClr val="E2E8F0"/>
                 </a:solidFill>
-                <a:latin typeface="Consolas" pitchFamily="34" charset="0"/>
-                <a:ea typeface="Consolas" pitchFamily="34" charset="-122"/>
-                <a:cs typeface="Consolas" pitchFamily="34" charset="-120"/>
-              </a:rPr>
-              <a:t>        </a:t>
-            </a:r>
-            <a:endParaRPr lang="en-US" sz="1100" dirty="0"/>
-          </a:p>
-          <a:p>
-            <a:pPr indent="0" marL="0">
-              <a:buNone/>
-            </a:pPr>
-            <a:r>
-              <a:rPr lang="en-US" sz="1100" dirty="0">
+                <a:latin typeface="Calibri" pitchFamily="34" charset="0"/>
+                <a:ea typeface="Calibri" pitchFamily="34" charset="-122"/>
+                <a:cs typeface="Calibri" pitchFamily="34" charset="-120"/>
+              </a:rPr>
+              <a:t>Optimisation du code : mise en cache, parallélisation</a:t>
+            </a:r>
+            <a:endParaRPr lang="en-US" sz="1400" dirty="0"/>
+          </a:p>
+          <a:p>
+            <a:pPr marL="342900" indent="-342900">
+              <a:lnSpc>
+                <a:spcPct val="130000"/>
+              </a:lnSpc>
+              <a:buSzPct val="100000"/>
+              <a:buChar char="•"/>
+            </a:pPr>
+            <a:r>
+              <a:rPr lang="en-US" sz="1400" dirty="0">
                 <a:solidFill>
                   <a:srgbClr val="E2E8F0"/>
                 </a:solidFill>
-                <a:latin typeface="Consolas" pitchFamily="34" charset="0"/>
-                <a:ea typeface="Consolas" pitchFamily="34" charset="-122"/>
-                <a:cs typeface="Consolas" pitchFamily="34" charset="-120"/>
-              </a:rPr>
-              <a:t>        for (int n : tailles) {</a:t>
-            </a:r>
-            <a:endParaRPr lang="en-US" sz="1100" dirty="0"/>
-          </a:p>
-          <a:p>
-            <a:pPr indent="0" marL="0">
-              <a:buNone/>
-            </a:pPr>
-            <a:r>
-              <a:rPr lang="en-US" sz="1100" dirty="0">
+                <a:latin typeface="Calibri" pitchFamily="34" charset="0"/>
+                <a:ea typeface="Calibri" pitchFamily="34" charset="-122"/>
+                <a:cs typeface="Calibri" pitchFamily="34" charset="-120"/>
+              </a:rPr>
+              <a:t>Matériel : CPU, RAM, SSD vs HDD</a:t>
+            </a:r>
+            <a:endParaRPr lang="en-US" sz="1400" dirty="0"/>
+          </a:p>
+          <a:p>
+            <a:pPr marL="342900" indent="-342900">
+              <a:lnSpc>
+                <a:spcPct val="130000"/>
+              </a:lnSpc>
+              <a:buSzPct val="100000"/>
+              <a:buChar char="•"/>
+            </a:pPr>
+            <a:r>
+              <a:rPr lang="en-US" sz="1400" dirty="0">
                 <a:solidFill>
                   <a:srgbClr val="E2E8F0"/>
                 </a:solidFill>
-                <a:latin typeface="Consolas" pitchFamily="34" charset="0"/>
-                <a:ea typeface="Consolas" pitchFamily="34" charset="-122"/>
-                <a:cs typeface="Consolas" pitchFamily="34" charset="-120"/>
-              </a:rPr>
-              <a:t>            int[] tableau = genererTableau(n);</a:t>
-            </a:r>
-            <a:endParaRPr lang="en-US" sz="1100" dirty="0"/>
-          </a:p>
-          <a:p>
-            <a:pPr indent="0" marL="0">
-              <a:buNone/>
-            </a:pPr>
-            <a:r>
-              <a:rPr lang="en-US" sz="1100" dirty="0">
+                <a:latin typeface="Calibri" pitchFamily="34" charset="0"/>
+                <a:ea typeface="Calibri" pitchFamily="34" charset="-122"/>
+                <a:cs typeface="Calibri" pitchFamily="34" charset="-120"/>
+              </a:rPr>
+              <a:t>Compilateur/interpréteur : JIT, optimisations</a:t>
+            </a:r>
+            <a:endParaRPr lang="en-US" sz="1400" dirty="0"/>
+          </a:p>
+          <a:p>
+            <a:pPr marL="342900" indent="-342900">
+              <a:lnSpc>
+                <a:spcPct val="130000"/>
+              </a:lnSpc>
+              <a:buSzPct val="100000"/>
+              <a:buChar char="•"/>
+            </a:pPr>
+            <a:r>
+              <a:rPr lang="en-US" sz="1400" dirty="0">
                 <a:solidFill>
                   <a:srgbClr val="E2E8F0"/>
                 </a:solidFill>
-                <a:latin typeface="Consolas" pitchFamily="34" charset="0"/>
-                <a:ea typeface="Consolas" pitchFamily="34" charset="-122"/>
-                <a:cs typeface="Consolas" pitchFamily="34" charset="-120"/>
-              </a:rPr>
-              <a:t>            </a:t>
-            </a:r>
-            <a:endParaRPr lang="en-US" sz="1100" dirty="0"/>
-          </a:p>
-          <a:p>
-            <a:pPr indent="0" marL="0">
-              <a:buNone/>
-            </a:pPr>
-            <a:r>
-              <a:rPr lang="en-US" sz="1100" dirty="0">
-                <a:solidFill>
-                  <a:srgbClr val="64748B"/>
-                </a:solidFill>
-                <a:latin typeface="Consolas" pitchFamily="34" charset="0"/>
-                <a:ea typeface="Consolas" pitchFamily="34" charset="-122"/>
-                <a:cs typeface="Consolas" pitchFamily="34" charset="-120"/>
-              </a:rPr>
-              <a:t>            // Mesurer le temps</a:t>
-            </a:r>
-            <a:endParaRPr lang="en-US" sz="1100" dirty="0"/>
-          </a:p>
-          <a:p>
-            <a:pPr indent="0" marL="0">
-              <a:buNone/>
-            </a:pPr>
-            <a:r>
-              <a:rPr lang="en-US" sz="1100" dirty="0">
+                <a:latin typeface="Calibri" pitchFamily="34" charset="0"/>
+                <a:ea typeface="Calibri" pitchFamily="34" charset="-122"/>
+                <a:cs typeface="Calibri" pitchFamily="34" charset="-120"/>
+              </a:rPr>
+              <a:t>Taille des données : efficacité dépend de n</a:t>
+            </a:r>
+            <a:endParaRPr lang="en-US" sz="1400" dirty="0"/>
+          </a:p>
+          <a:p>
+            <a:pPr marL="342900" indent="-342900">
+              <a:lnSpc>
+                <a:spcPct val="130000"/>
+              </a:lnSpc>
+              <a:buSzPct val="100000"/>
+              <a:buChar char="•"/>
+            </a:pPr>
+            <a:r>
+              <a:rPr lang="en-US" sz="1400" dirty="0">
                 <a:solidFill>
                   <a:srgbClr val="E2E8F0"/>
                 </a:solidFill>
-                <a:latin typeface="Consolas" pitchFamily="34" charset="0"/>
-                <a:ea typeface="Consolas" pitchFamily="34" charset="-122"/>
-                <a:cs typeface="Consolas" pitchFamily="34" charset="-120"/>
-              </a:rPr>
-              <a:t>            long debut = System.nanoTime();</a:t>
-            </a:r>
-            <a:endParaRPr lang="en-US" sz="1100" dirty="0"/>
-          </a:p>
-          <a:p>
-            <a:pPr indent="0" marL="0">
-              <a:buNone/>
-            </a:pPr>
-            <a:r>
-              <a:rPr lang="en-US" sz="1100" dirty="0">
-                <a:solidFill>
-                  <a:srgbClr val="E2E8F0"/>
-                </a:solidFill>
-                <a:latin typeface="Consolas" pitchFamily="34" charset="0"/>
-                <a:ea typeface="Consolas" pitchFamily="34" charset="-122"/>
-                <a:cs typeface="Consolas" pitchFamily="34" charset="-120"/>
-              </a:rPr>
-              <a:t>            bubbleSort(tableau.clone());  // clone pour ne pas modifier</a:t>
-            </a:r>
-            <a:endParaRPr lang="en-US" sz="1100" dirty="0"/>
-          </a:p>
-          <a:p>
-            <a:pPr indent="0" marL="0">
-              <a:buNone/>
-            </a:pPr>
-            <a:r>
-              <a:rPr lang="en-US" sz="1100" dirty="0">
-                <a:solidFill>
-                  <a:srgbClr val="E2E8F0"/>
-                </a:solidFill>
-                <a:latin typeface="Consolas" pitchFamily="34" charset="0"/>
-                <a:ea typeface="Consolas" pitchFamily="34" charset="-122"/>
-                <a:cs typeface="Consolas" pitchFamily="34" charset="-120"/>
-              </a:rPr>
-              <a:t>            long tempsBubble = (System.nanoTime() - debut) / 1_000_000;</a:t>
-            </a:r>
-            <a:endParaRPr lang="en-US" sz="1100" dirty="0"/>
-          </a:p>
-          <a:p>
-            <a:pPr indent="0" marL="0">
-              <a:buNone/>
-            </a:pPr>
-            <a:r>
-              <a:rPr lang="en-US" sz="1100" dirty="0">
-                <a:solidFill>
-                  <a:srgbClr val="E2E8F0"/>
-                </a:solidFill>
-                <a:latin typeface="Consolas" pitchFamily="34" charset="0"/>
-                <a:ea typeface="Consolas" pitchFamily="34" charset="-122"/>
-                <a:cs typeface="Consolas" pitchFamily="34" charset="-120"/>
-              </a:rPr>
-              <a:t>            </a:t>
-            </a:r>
-            <a:endParaRPr lang="en-US" sz="1100" dirty="0"/>
-          </a:p>
-          <a:p>
-            <a:pPr indent="0" marL="0">
-              <a:buNone/>
-            </a:pPr>
-            <a:r>
-              <a:rPr lang="en-US" sz="1100" dirty="0">
-                <a:solidFill>
-                  <a:srgbClr val="E2E8F0"/>
-                </a:solidFill>
-                <a:latin typeface="Consolas" pitchFamily="34" charset="0"/>
-                <a:ea typeface="Consolas" pitchFamily="34" charset="-122"/>
-                <a:cs typeface="Consolas" pitchFamily="34" charset="-120"/>
-              </a:rPr>
-              <a:t>            debut = System.nanoTime();</a:t>
-            </a:r>
-            <a:endParaRPr lang="en-US" sz="1100" dirty="0"/>
-          </a:p>
-          <a:p>
-            <a:pPr indent="0" marL="0">
-              <a:buNone/>
-            </a:pPr>
-            <a:r>
-              <a:rPr lang="en-US" sz="1100" dirty="0">
-                <a:solidFill>
-                  <a:srgbClr val="E2E8F0"/>
-                </a:solidFill>
-                <a:latin typeface="Consolas" pitchFamily="34" charset="0"/>
-                <a:ea typeface="Consolas" pitchFamily="34" charset="-122"/>
-                <a:cs typeface="Consolas" pitchFamily="34" charset="-120"/>
-              </a:rPr>
-              <a:t>            Arrays.sort(tableau.clone()); // Quick Sort Java</a:t>
-            </a:r>
-            <a:endParaRPr lang="en-US" sz="1100" dirty="0"/>
-          </a:p>
-          <a:p>
-            <a:pPr indent="0" marL="0">
-              <a:buNone/>
-            </a:pPr>
-            <a:r>
-              <a:rPr lang="en-US" sz="1100" dirty="0">
-                <a:solidFill>
-                  <a:srgbClr val="E2E8F0"/>
-                </a:solidFill>
-                <a:latin typeface="Consolas" pitchFamily="34" charset="0"/>
-                <a:ea typeface="Consolas" pitchFamily="34" charset="-122"/>
-                <a:cs typeface="Consolas" pitchFamily="34" charset="-120"/>
-              </a:rPr>
-              <a:t>            long tempsQuick = (System.nanoTime() - debut) / 1_000_000;</a:t>
-            </a:r>
-            <a:endParaRPr lang="en-US" sz="1100" dirty="0"/>
-          </a:p>
-          <a:p>
-            <a:pPr indent="0" marL="0">
-              <a:buNone/>
-            </a:pPr>
-            <a:r>
-              <a:rPr lang="en-US" sz="1100" dirty="0">
-                <a:solidFill>
-                  <a:srgbClr val="E2E8F0"/>
-                </a:solidFill>
-                <a:latin typeface="Consolas" pitchFamily="34" charset="0"/>
-                <a:ea typeface="Consolas" pitchFamily="34" charset="-122"/>
-                <a:cs typeface="Consolas" pitchFamily="34" charset="-120"/>
-              </a:rPr>
-              <a:t>            </a:t>
-            </a:r>
-            <a:endParaRPr lang="en-US" sz="1100" dirty="0"/>
-          </a:p>
-          <a:p>
-            <a:pPr indent="0" marL="0">
-              <a:buNone/>
-            </a:pPr>
-            <a:r>
-              <a:rPr lang="en-US" sz="1100" dirty="0">
-                <a:solidFill>
-                  <a:srgbClr val="64748B"/>
-                </a:solidFill>
-                <a:latin typeface="Consolas" pitchFamily="34" charset="0"/>
-                <a:ea typeface="Consolas" pitchFamily="34" charset="-122"/>
-                <a:cs typeface="Consolas" pitchFamily="34" charset="-120"/>
-              </a:rPr>
-              <a:t>            // Mesurer la mémoire</a:t>
-            </a:r>
-            <a:endParaRPr lang="en-US" sz="1100" dirty="0"/>
-          </a:p>
-          <a:p>
-            <a:pPr indent="0" marL="0">
-              <a:buNone/>
-            </a:pPr>
-            <a:r>
-              <a:rPr lang="en-US" sz="1100" dirty="0">
-                <a:solidFill>
-                  <a:srgbClr val="E2E8F0"/>
-                </a:solidFill>
-                <a:latin typeface="Consolas" pitchFamily="34" charset="0"/>
-                <a:ea typeface="Consolas" pitchFamily="34" charset="-122"/>
-                <a:cs typeface="Consolas" pitchFamily="34" charset="-120"/>
-              </a:rPr>
-              <a:t>            Runtime rt = Runtime.getRuntime();</a:t>
-            </a:r>
-            <a:endParaRPr lang="en-US" sz="1100" dirty="0"/>
-          </a:p>
-          <a:p>
-            <a:pPr indent="0" marL="0">
-              <a:buNone/>
-            </a:pPr>
-            <a:r>
-              <a:rPr lang="en-US" sz="1100" dirty="0">
-                <a:solidFill>
-                  <a:srgbClr val="E2E8F0"/>
-                </a:solidFill>
-                <a:latin typeface="Consolas" pitchFamily="34" charset="0"/>
-                <a:ea typeface="Consolas" pitchFamily="34" charset="-122"/>
-                <a:cs typeface="Consolas" pitchFamily="34" charset="-120"/>
-              </a:rPr>
-              <a:t>            long memoire = (rt.totalMemory() - rt.freeMemory()) / 1024;</a:t>
-            </a:r>
-            <a:endParaRPr lang="en-US" sz="1100" dirty="0"/>
-          </a:p>
-          <a:p>
-            <a:pPr indent="0" marL="0">
-              <a:buNone/>
-            </a:pPr>
-            <a:r>
-              <a:rPr lang="en-US" sz="1100" dirty="0">
-                <a:solidFill>
-                  <a:srgbClr val="E2E8F0"/>
-                </a:solidFill>
-                <a:latin typeface="Consolas" pitchFamily="34" charset="0"/>
-                <a:ea typeface="Consolas" pitchFamily="34" charset="-122"/>
-                <a:cs typeface="Consolas" pitchFamily="34" charset="-120"/>
-              </a:rPr>
-              <a:t>            </a:t>
-            </a:r>
-            <a:endParaRPr lang="en-US" sz="1100" dirty="0"/>
-          </a:p>
-          <a:p>
-            <a:pPr indent="0" marL="0">
-              <a:buNone/>
-            </a:pPr>
-            <a:r>
-              <a:rPr lang="en-US" sz="1100" dirty="0">
-                <a:solidFill>
-                  <a:srgbClr val="E2E8F0"/>
-                </a:solidFill>
-                <a:latin typeface="Consolas" pitchFamily="34" charset="0"/>
-                <a:ea typeface="Consolas" pitchFamily="34" charset="-122"/>
-                <a:cs typeface="Consolas" pitchFamily="34" charset="-120"/>
-              </a:rPr>
-              <a:t>            System.out.printf("n=%6d | Bubble: %5d ms | Quick: %3d ms | Mem: %d KB%n",</a:t>
-            </a:r>
-            <a:endParaRPr lang="en-US" sz="1100" dirty="0"/>
-          </a:p>
-          <a:p>
-            <a:pPr indent="0" marL="0">
-              <a:buNone/>
-            </a:pPr>
-            <a:r>
-              <a:rPr lang="en-US" sz="1100" dirty="0">
-                <a:solidFill>
-                  <a:srgbClr val="E2E8F0"/>
-                </a:solidFill>
-                <a:latin typeface="Consolas" pitchFamily="34" charset="0"/>
-                <a:ea typeface="Consolas" pitchFamily="34" charset="-122"/>
-                <a:cs typeface="Consolas" pitchFamily="34" charset="-120"/>
-              </a:rPr>
-              <a:t>                              n, tempsBubble, tempsQuick, memoire);</a:t>
-            </a:r>
-            <a:endParaRPr lang="en-US" sz="1100" dirty="0"/>
-          </a:p>
-          <a:p>
-            <a:pPr indent="0" marL="0">
-              <a:buNone/>
-            </a:pPr>
-            <a:r>
-              <a:rPr lang="en-US" sz="1100" dirty="0">
-                <a:solidFill>
-                  <a:srgbClr val="E2E8F0"/>
-                </a:solidFill>
-                <a:latin typeface="Consolas" pitchFamily="34" charset="0"/>
-                <a:ea typeface="Consolas" pitchFamily="34" charset="-122"/>
-                <a:cs typeface="Consolas" pitchFamily="34" charset="-120"/>
-              </a:rPr>
-              <a:t>        }</a:t>
-            </a:r>
-            <a:endParaRPr lang="en-US" sz="1100" dirty="0"/>
-          </a:p>
-          <a:p>
-            <a:pPr indent="0" marL="0">
-              <a:buNone/>
-            </a:pPr>
-            <a:r>
-              <a:rPr lang="en-US" sz="1100" dirty="0">
-                <a:solidFill>
-                  <a:srgbClr val="E2E8F0"/>
-                </a:solidFill>
-                <a:latin typeface="Consolas" pitchFamily="34" charset="0"/>
-                <a:ea typeface="Consolas" pitchFamily="34" charset="-122"/>
-                <a:cs typeface="Consolas" pitchFamily="34" charset="-120"/>
-              </a:rPr>
-              <a:t>    }</a:t>
-            </a:r>
-            <a:endParaRPr lang="en-US" sz="1100" dirty="0"/>
-          </a:p>
-          <a:p>
-            <a:pPr indent="0" marL="0">
-              <a:buNone/>
-            </a:pPr>
-            <a:r>
-              <a:rPr lang="en-US" sz="1100" dirty="0">
-                <a:solidFill>
-                  <a:srgbClr val="E2E8F0"/>
-                </a:solidFill>
-                <a:latin typeface="Consolas" pitchFamily="34" charset="0"/>
-                <a:ea typeface="Consolas" pitchFamily="34" charset="-122"/>
-                <a:cs typeface="Consolas" pitchFamily="34" charset="-120"/>
-              </a:rPr>
-              <a:t>}</a:t>
-            </a:r>
-            <a:endParaRPr lang="en-US" sz="1100" dirty="0"/>
-          </a:p>
-          <a:p>
-            <a:pPr indent="0" marL="0">
-              <a:buNone/>
-            </a:pPr>
-            <a:r>
-              <a:rPr lang="en-US" sz="1100" dirty="0">
-                <a:solidFill>
-                  <a:srgbClr val="64748B"/>
-                </a:solidFill>
-                <a:latin typeface="Consolas" pitchFamily="34" charset="0"/>
-                <a:ea typeface="Consolas" pitchFamily="34" charset="-122"/>
-                <a:cs typeface="Consolas" pitchFamily="34" charset="-120"/>
-              </a:rPr>
-              <a:t>// Résultat attendu : Bubble explose, Quick reste rapide</a:t>
-            </a:r>
-            <a:endParaRPr lang="en-US" sz="1100" dirty="0"/>
+                <a:latin typeface="Calibri" pitchFamily="34" charset="0"/>
+                <a:ea typeface="Calibri" pitchFamily="34" charset="-122"/>
+                <a:cs typeface="Calibri" pitchFamily="34" charset="-120"/>
+              </a:rPr>
+              <a:t>Garbage Collector : pauses imprévisibles en Java</a:t>
+            </a:r>
+            <a:endParaRPr lang="en-US" sz="1400" dirty="0"/>
           </a:p>
         </p:txBody>
       </p:sp>
@@ -2734,7 +2406,7 @@
     <p:bg>
       <p:bgPr>
         <a:solidFill>
-          <a:srgbClr val="0F172A"/>
+          <a:srgbClr val="1A1500"/>
         </a:solidFill>
       </p:bgPr>
     </p:bg>
@@ -2754,62 +2426,64 @@
       </p:grpSpPr>
       <p:sp>
         <p:nvSpPr>
-          <p:cNvPr id="2" name="Shape 0"/>
+          <p:cNvPr id="2" name="Text 0"/>
           <p:cNvSpPr/>
           <p:nvPr/>
         </p:nvSpPr>
         <p:spPr>
           <a:xfrm>
-            <a:off x="0" y="0"/>
-            <a:ext cx="9144000" cy="73152"/>
-          </a:xfrm>
-          <a:prstGeom prst="rect">
-            <a:avLst/>
+            <a:off x="548640" y="274320"/>
+            <a:ext cx="8229600" cy="548640"/>
+          </a:xfrm>
+          <a:prstGeom prst="rect">
+            <a:avLst/>
+          </a:prstGeom>
+          <a:noFill/>
+          <a:ln/>
+        </p:spPr>
+        <p:txBody>
+          <a:bodyPr wrap="square" rtlCol="0" anchor="ctr"/>
+          <a:lstStyle/>
+          <a:p>
+            <a:pPr indent="0" marL="0">
+              <a:buNone/>
+            </a:pPr>
+            <a:r>
+              <a:rPr lang="en-US" sz="2800" b="1" dirty="0">
+                <a:solidFill>
+                  <a:srgbClr val="FFFFFF"/>
+                </a:solidFill>
+                <a:latin typeface="Calibri" pitchFamily="34" charset="0"/>
+                <a:ea typeface="Calibri" pitchFamily="34" charset="-122"/>
+                <a:cs typeface="Calibri" pitchFamily="34" charset="-120"/>
+              </a:rPr>
+              <a:t>Récapitulatif</a:t>
+            </a:r>
+            <a:endParaRPr lang="en-US" sz="2800" dirty="0"/>
+          </a:p>
+        </p:txBody>
+      </p:sp>
+      <p:sp>
+        <p:nvSpPr>
+          <p:cNvPr id="3" name="Shape 1"/>
+          <p:cNvSpPr/>
+          <p:nvPr/>
+        </p:nvSpPr>
+        <p:spPr>
+          <a:xfrm>
+            <a:off x="548640" y="1097280"/>
+            <a:ext cx="2621280" cy="3200400"/>
+          </a:xfrm>
+          <a:prstGeom prst="roundRect">
+            <a:avLst>
+              <a:gd name="adj" fmla="val 3488"/>
+            </a:avLst>
           </a:prstGeom>
           <a:solidFill>
-            <a:srgbClr val="DC2626"/>
+            <a:srgbClr val="2D2400"/>
           </a:solidFill>
           <a:ln/>
         </p:spPr>
-      </p:sp>
-      <p:sp>
-        <p:nvSpPr>
-          <p:cNvPr id="3" name="Text 1"/>
-          <p:cNvSpPr/>
-          <p:nvPr/>
-        </p:nvSpPr>
-        <p:spPr>
-          <a:xfrm>
-            <a:off x="457200" y="182880"/>
-            <a:ext cx="7315200" cy="457200"/>
-          </a:xfrm>
-          <a:prstGeom prst="rect">
-            <a:avLst/>
-          </a:prstGeom>
-          <a:noFill/>
-          <a:ln/>
-        </p:spPr>
-        <p:txBody>
-          <a:bodyPr wrap="square" rtlCol="0" anchor="ctr"/>
-          <a:lstStyle/>
-          <a:p>
-            <a:pPr indent="0" marL="0">
-              <a:buNone/>
-            </a:pPr>
-            <a:r>
-              <a:rPr lang="en-US" sz="2200" b="1" dirty="0">
-                <a:solidFill>
-                  <a:srgbClr val="DC2626"/>
-                </a:solidFill>
-                <a:latin typeface="Trebuchet MS" pitchFamily="34" charset="0"/>
-                <a:ea typeface="Trebuchet MS" pitchFamily="34" charset="-122"/>
-                <a:cs typeface="Trebuchet MS" pitchFamily="34" charset="-120"/>
-              </a:rPr>
-              <a:t>NOTES ENSEIGNANT — Ch.13 P7 Mesurer efficacité</a:t>
-            </a:r>
-            <a:endParaRPr lang="en-US" sz="2200" dirty="0"/>
-          </a:p>
-        </p:txBody>
       </p:sp>
       <p:sp>
         <p:nvSpPr>
@@ -2819,8 +2493,8 @@
         </p:nvSpPr>
         <p:spPr>
           <a:xfrm>
-            <a:off x="457200" y="731520"/>
-            <a:ext cx="8229600" cy="4114800"/>
+            <a:off x="548640" y="1280160"/>
+            <a:ext cx="2621280" cy="457200"/>
           </a:xfrm>
           <a:prstGeom prst="rect">
             <a:avLst/>
@@ -2832,194 +2506,368 @@
           <a:bodyPr wrap="square" rtlCol="0" anchor="ctr"/>
           <a:lstStyle/>
           <a:p>
-            <a:pPr indent="0" marL="0">
+            <a:pPr algn="ctr" indent="0" marL="0">
               <a:buNone/>
             </a:pPr>
             <a:r>
-              <a:rPr lang="en-US" sz="1500" b="1" dirty="0">
-                <a:solidFill>
-                  <a:srgbClr val="00A896"/>
-                </a:solidFill>
-                <a:latin typeface="Trebuchet MS" pitchFamily="34" charset="0"/>
-                <a:ea typeface="Trebuchet MS" pitchFamily="34" charset="-122"/>
-                <a:cs typeface="Trebuchet MS" pitchFamily="34" charset="-120"/>
-              </a:rPr>
-              <a:t>Plan de séance :</a:t>
-            </a:r>
-            <a:endParaRPr lang="en-US" sz="1500" dirty="0"/>
-          </a:p>
-          <a:p>
-            <a:pPr indent="0" marL="0">
+              <a:rPr lang="en-US" sz="2800" dirty="0">
+                <a:solidFill>
+                  <a:srgbClr val="000000"/>
+                </a:solidFill>
+              </a:rPr>
+              <a:t>📊</a:t>
+            </a:r>
+            <a:endParaRPr lang="en-US" sz="2800" dirty="0"/>
+          </a:p>
+        </p:txBody>
+      </p:sp>
+      <p:sp>
+        <p:nvSpPr>
+          <p:cNvPr id="5" name="Text 3"/>
+          <p:cNvSpPr/>
+          <p:nvPr/>
+        </p:nvSpPr>
+        <p:spPr>
+          <a:xfrm>
+            <a:off x="685800" y="1828800"/>
+            <a:ext cx="2346960" cy="365760"/>
+          </a:xfrm>
+          <a:prstGeom prst="rect">
+            <a:avLst/>
+          </a:prstGeom>
+          <a:noFill/>
+          <a:ln/>
+        </p:spPr>
+        <p:txBody>
+          <a:bodyPr wrap="square" rtlCol="0" anchor="ctr"/>
+          <a:lstStyle/>
+          <a:p>
+            <a:pPr algn="ctr" indent="0" marL="0">
               <a:buNone/>
             </a:pPr>
-            <a:endParaRPr lang="en-US" sz="1500" dirty="0"/>
-          </a:p>
-          <a:p>
-            <a:pPr marL="342900" indent="-342900">
-              <a:buSzPct val="100000"/>
-              <a:buChar char="•"/>
-            </a:pPr>
-            <a:r>
-              <a:rPr lang="en-US" sz="1200" dirty="0">
-                <a:solidFill>
-                  <a:srgbClr val="E2E8F0"/>
+            <a:r>
+              <a:rPr lang="en-US" sz="1300" b="1" dirty="0">
+                <a:solidFill>
+                  <a:srgbClr val="D97706"/>
                 </a:solidFill>
                 <a:latin typeface="Calibri" pitchFamily="34" charset="0"/>
                 <a:ea typeface="Calibri" pitchFamily="34" charset="-122"/>
                 <a:cs typeface="Calibri" pitchFamily="34" charset="-120"/>
               </a:rPr>
-              <a:t>P1 : Méthode 1 — analyse théorique Big O (compter les opérations)</a:t>
-            </a:r>
-            <a:endParaRPr lang="en-US" sz="1500" dirty="0"/>
-          </a:p>
-          <a:p>
-            <a:pPr marL="342900" indent="-342900">
-              <a:buSzPct val="100000"/>
-              <a:buChar char="•"/>
-            </a:pPr>
-            <a:r>
-              <a:rPr lang="en-US" sz="1200" dirty="0">
-                <a:solidFill>
-                  <a:srgbClr val="E2E8F0"/>
+              <a:t>Big O</a:t>
+            </a:r>
+            <a:endParaRPr lang="en-US" sz="1300" dirty="0"/>
+          </a:p>
+        </p:txBody>
+      </p:sp>
+      <p:sp>
+        <p:nvSpPr>
+          <p:cNvPr id="6" name="Text 4"/>
+          <p:cNvSpPr/>
+          <p:nvPr/>
+        </p:nvSpPr>
+        <p:spPr>
+          <a:xfrm>
+            <a:off x="685800" y="2286000"/>
+            <a:ext cx="2346960" cy="1828800"/>
+          </a:xfrm>
+          <a:prstGeom prst="rect">
+            <a:avLst/>
+          </a:prstGeom>
+          <a:noFill/>
+          <a:ln/>
+        </p:spPr>
+        <p:txBody>
+          <a:bodyPr wrap="square" rtlCol="0" anchor="t"/>
+          <a:lstStyle/>
+          <a:p>
+            <a:pPr algn="ctr" indent="0" marL="0">
+              <a:buNone/>
+            </a:pPr>
+            <a:r>
+              <a:rPr lang="en-US" sz="1100" dirty="0">
+                <a:solidFill>
+                  <a:srgbClr val="94A3B8"/>
                 </a:solidFill>
                 <a:latin typeface="Calibri" pitchFamily="34" charset="0"/>
                 <a:ea typeface="Calibri" pitchFamily="34" charset="-122"/>
                 <a:cs typeface="Calibri" pitchFamily="34" charset="-120"/>
               </a:rPr>
-              <a:t>P2 : Méthode 2 — benchmark Java avec System.nanoTime()</a:t>
-            </a:r>
-            <a:endParaRPr lang="en-US" sz="1500" dirty="0"/>
-          </a:p>
-          <a:p>
-            <a:pPr marL="342900" indent="-342900">
-              <a:buSzPct val="100000"/>
-              <a:buChar char="•"/>
-            </a:pPr>
-            <a:r>
-              <a:rPr lang="en-US" sz="1200" dirty="0">
-                <a:solidFill>
-                  <a:srgbClr val="E2E8F0"/>
+              <a:t>Analyse théorique de la tendance</a:t>
+            </a:r>
+            <a:endParaRPr lang="en-US" sz="1100" dirty="0"/>
+          </a:p>
+        </p:txBody>
+      </p:sp>
+      <p:sp>
+        <p:nvSpPr>
+          <p:cNvPr id="7" name="Shape 5"/>
+          <p:cNvSpPr/>
+          <p:nvPr/>
+        </p:nvSpPr>
+        <p:spPr>
+          <a:xfrm>
+            <a:off x="3352800" y="1097280"/>
+            <a:ext cx="2621280" cy="3200400"/>
+          </a:xfrm>
+          <a:prstGeom prst="roundRect">
+            <a:avLst>
+              <a:gd name="adj" fmla="val 3488"/>
+            </a:avLst>
+          </a:prstGeom>
+          <a:solidFill>
+            <a:srgbClr val="2D2400"/>
+          </a:solidFill>
+          <a:ln/>
+        </p:spPr>
+      </p:sp>
+      <p:sp>
+        <p:nvSpPr>
+          <p:cNvPr id="8" name="Text 6"/>
+          <p:cNvSpPr/>
+          <p:nvPr/>
+        </p:nvSpPr>
+        <p:spPr>
+          <a:xfrm>
+            <a:off x="3352800" y="1280160"/>
+            <a:ext cx="2621280" cy="457200"/>
+          </a:xfrm>
+          <a:prstGeom prst="rect">
+            <a:avLst/>
+          </a:prstGeom>
+          <a:noFill/>
+          <a:ln/>
+        </p:spPr>
+        <p:txBody>
+          <a:bodyPr wrap="square" rtlCol="0" anchor="ctr"/>
+          <a:lstStyle/>
+          <a:p>
+            <a:pPr algn="ctr" indent="0" marL="0">
+              <a:buNone/>
+            </a:pPr>
+            <a:r>
+              <a:rPr lang="en-US" sz="2800" dirty="0">
+                <a:solidFill>
+                  <a:srgbClr val="000000"/>
+                </a:solidFill>
+              </a:rPr>
+              <a:t>⏱️</a:t>
+            </a:r>
+            <a:endParaRPr lang="en-US" sz="2800" dirty="0"/>
+          </a:p>
+        </p:txBody>
+      </p:sp>
+      <p:sp>
+        <p:nvSpPr>
+          <p:cNvPr id="9" name="Text 7"/>
+          <p:cNvSpPr/>
+          <p:nvPr/>
+        </p:nvSpPr>
+        <p:spPr>
+          <a:xfrm>
+            <a:off x="3489960" y="1828800"/>
+            <a:ext cx="2346960" cy="365760"/>
+          </a:xfrm>
+          <a:prstGeom prst="rect">
+            <a:avLst/>
+          </a:prstGeom>
+          <a:noFill/>
+          <a:ln/>
+        </p:spPr>
+        <p:txBody>
+          <a:bodyPr wrap="square" rtlCol="0" anchor="ctr"/>
+          <a:lstStyle/>
+          <a:p>
+            <a:pPr algn="ctr" indent="0" marL="0">
+              <a:buNone/>
+            </a:pPr>
+            <a:r>
+              <a:rPr lang="en-US" sz="1300" b="1" dirty="0">
+                <a:solidFill>
+                  <a:srgbClr val="D97706"/>
                 </a:solidFill>
                 <a:latin typeface="Calibri" pitchFamily="34" charset="0"/>
                 <a:ea typeface="Calibri" pitchFamily="34" charset="-122"/>
                 <a:cs typeface="Calibri" pitchFamily="34" charset="-120"/>
               </a:rPr>
-              <a:t>P3 : Live coding benchmark complet (Bubble vs Quick sur différents n)</a:t>
-            </a:r>
-            <a:endParaRPr lang="en-US" sz="1500" dirty="0"/>
-          </a:p>
-          <a:p>
-            <a:pPr marL="342900" indent="-342900">
-              <a:buSzPct val="100000"/>
-              <a:buChar char="•"/>
-            </a:pPr>
-            <a:r>
-              <a:rPr lang="en-US" sz="1200" dirty="0">
-                <a:solidFill>
-                  <a:srgbClr val="E2E8F0"/>
+              <a:t>Benchmark</a:t>
+            </a:r>
+            <a:endParaRPr lang="en-US" sz="1300" dirty="0"/>
+          </a:p>
+        </p:txBody>
+      </p:sp>
+      <p:sp>
+        <p:nvSpPr>
+          <p:cNvPr id="10" name="Text 8"/>
+          <p:cNvSpPr/>
+          <p:nvPr/>
+        </p:nvSpPr>
+        <p:spPr>
+          <a:xfrm>
+            <a:off x="3489960" y="2286000"/>
+            <a:ext cx="2346960" cy="1828800"/>
+          </a:xfrm>
+          <a:prstGeom prst="rect">
+            <a:avLst/>
+          </a:prstGeom>
+          <a:noFill/>
+          <a:ln/>
+        </p:spPr>
+        <p:txBody>
+          <a:bodyPr wrap="square" rtlCol="0" anchor="t"/>
+          <a:lstStyle/>
+          <a:p>
+            <a:pPr algn="ctr" indent="0" marL="0">
+              <a:buNone/>
+            </a:pPr>
+            <a:r>
+              <a:rPr lang="en-US" sz="1100" dirty="0">
+                <a:solidFill>
+                  <a:srgbClr val="94A3B8"/>
                 </a:solidFill>
                 <a:latin typeface="Calibri" pitchFamily="34" charset="0"/>
                 <a:ea typeface="Calibri" pitchFamily="34" charset="-122"/>
                 <a:cs typeface="Calibri" pitchFamily="34" charset="-120"/>
               </a:rPr>
-              <a:t>P4 : Exercice : mesurer les deux méthodes sur un exercice concret</a:t>
-            </a:r>
-            <a:endParaRPr lang="en-US" sz="1500" dirty="0"/>
-          </a:p>
-          <a:p>
-            <a:pPr indent="0" marL="0">
+              <a:t>Mesure pratique en millisecondes</a:t>
+            </a:r>
+            <a:endParaRPr lang="en-US" sz="1100" dirty="0"/>
+          </a:p>
+        </p:txBody>
+      </p:sp>
+      <p:sp>
+        <p:nvSpPr>
+          <p:cNvPr id="11" name="Shape 9"/>
+          <p:cNvSpPr/>
+          <p:nvPr/>
+        </p:nvSpPr>
+        <p:spPr>
+          <a:xfrm>
+            <a:off x="6156960" y="1097280"/>
+            <a:ext cx="2621280" cy="3200400"/>
+          </a:xfrm>
+          <a:prstGeom prst="roundRect">
+            <a:avLst>
+              <a:gd name="adj" fmla="val 3488"/>
+            </a:avLst>
+          </a:prstGeom>
+          <a:solidFill>
+            <a:srgbClr val="2D2400"/>
+          </a:solidFill>
+          <a:ln/>
+        </p:spPr>
+      </p:sp>
+      <p:sp>
+        <p:nvSpPr>
+          <p:cNvPr id="12" name="Text 10"/>
+          <p:cNvSpPr/>
+          <p:nvPr/>
+        </p:nvSpPr>
+        <p:spPr>
+          <a:xfrm>
+            <a:off x="6156960" y="1280160"/>
+            <a:ext cx="2621280" cy="457200"/>
+          </a:xfrm>
+          <a:prstGeom prst="rect">
+            <a:avLst/>
+          </a:prstGeom>
+          <a:noFill/>
+          <a:ln/>
+        </p:spPr>
+        <p:txBody>
+          <a:bodyPr wrap="square" rtlCol="0" anchor="ctr"/>
+          <a:lstStyle/>
+          <a:p>
+            <a:pPr algn="ctr" indent="0" marL="0">
               <a:buNone/>
             </a:pPr>
-            <a:endParaRPr lang="en-US" sz="1500" dirty="0"/>
-          </a:p>
-          <a:p>
-            <a:pPr indent="0" marL="0">
+            <a:r>
+              <a:rPr lang="en-US" sz="2800" dirty="0">
+                <a:solidFill>
+                  <a:srgbClr val="000000"/>
+                </a:solidFill>
+              </a:rPr>
+              <a:t>💾</a:t>
+            </a:r>
+            <a:endParaRPr lang="en-US" sz="2800" dirty="0"/>
+          </a:p>
+        </p:txBody>
+      </p:sp>
+      <p:sp>
+        <p:nvSpPr>
+          <p:cNvPr id="13" name="Text 11"/>
+          <p:cNvSpPr/>
+          <p:nvPr/>
+        </p:nvSpPr>
+        <p:spPr>
+          <a:xfrm>
+            <a:off x="6294120" y="1828800"/>
+            <a:ext cx="2346960" cy="365760"/>
+          </a:xfrm>
+          <a:prstGeom prst="rect">
+            <a:avLst/>
+          </a:prstGeom>
+          <a:noFill/>
+          <a:ln/>
+        </p:spPr>
+        <p:txBody>
+          <a:bodyPr wrap="square" rtlCol="0" anchor="ctr"/>
+          <a:lstStyle/>
+          <a:p>
+            <a:pPr algn="ctr" indent="0" marL="0">
               <a:buNone/>
             </a:pPr>
             <a:r>
-              <a:rPr lang="en-US" sz="1400" b="1" dirty="0">
-                <a:solidFill>
-                  <a:srgbClr val="F97316"/>
+              <a:rPr lang="en-US" sz="1300" b="1" dirty="0">
+                <a:solidFill>
+                  <a:srgbClr val="D97706"/>
                 </a:solidFill>
                 <a:latin typeface="Calibri" pitchFamily="34" charset="0"/>
                 <a:ea typeface="Calibri" pitchFamily="34" charset="-122"/>
                 <a:cs typeface="Calibri" pitchFamily="34" charset="-120"/>
               </a:rPr>
-              <a:t>Critère P7 — l'étudiant doit :</a:t>
-            </a:r>
-            <a:endParaRPr lang="en-US" sz="1500" dirty="0"/>
-          </a:p>
-          <a:p>
-            <a:pPr marL="342900" indent="-342900">
-              <a:buSzPct val="100000"/>
-              <a:buChar char="•"/>
-            </a:pPr>
-            <a:r>
-              <a:rPr lang="en-US" sz="1200" dirty="0">
-                <a:solidFill>
-                  <a:srgbClr val="E2E8F0"/>
+              <a:t>Ressources</a:t>
+            </a:r>
+            <a:endParaRPr lang="en-US" sz="1300" dirty="0"/>
+          </a:p>
+        </p:txBody>
+      </p:sp>
+      <p:sp>
+        <p:nvSpPr>
+          <p:cNvPr id="14" name="Text 12"/>
+          <p:cNvSpPr/>
+          <p:nvPr/>
+        </p:nvSpPr>
+        <p:spPr>
+          <a:xfrm>
+            <a:off x="6294120" y="2286000"/>
+            <a:ext cx="2346960" cy="1828800"/>
+          </a:xfrm>
+          <a:prstGeom prst="rect">
+            <a:avLst/>
+          </a:prstGeom>
+          <a:noFill/>
+          <a:ln/>
+        </p:spPr>
+        <p:txBody>
+          <a:bodyPr wrap="square" rtlCol="0" anchor="t"/>
+          <a:lstStyle/>
+          <a:p>
+            <a:pPr algn="ctr" indent="0" marL="0">
+              <a:buNone/>
+            </a:pPr>
+            <a:r>
+              <a:rPr lang="en-US" sz="1100" dirty="0">
+                <a:solidFill>
+                  <a:srgbClr val="94A3B8"/>
                 </a:solidFill>
                 <a:latin typeface="Calibri" pitchFamily="34" charset="0"/>
                 <a:ea typeface="Calibri" pitchFamily="34" charset="-122"/>
                 <a:cs typeface="Calibri" pitchFamily="34" charset="-120"/>
               </a:rPr>
-              <a:t>Présenter DEUX méthodes distinctes de mesure d'efficacité</a:t>
-            </a:r>
-            <a:endParaRPr lang="en-US" sz="1500" dirty="0"/>
-          </a:p>
-          <a:p>
-            <a:pPr marL="342900" indent="-342900">
-              <a:buSzPct val="100000"/>
-              <a:buChar char="•"/>
-            </a:pPr>
-            <a:r>
-              <a:rPr lang="en-US" sz="1200" dirty="0">
-                <a:solidFill>
-                  <a:srgbClr val="E2E8F0"/>
-                </a:solidFill>
-                <a:latin typeface="Calibri" pitchFamily="34" charset="0"/>
-                <a:ea typeface="Calibri" pitchFamily="34" charset="-122"/>
-                <a:cs typeface="Calibri" pitchFamily="34" charset="-120"/>
-              </a:rPr>
-              <a:t>Méthode 1 : analyse Big O (théorique, compter les opérations)</a:t>
-            </a:r>
-            <a:endParaRPr lang="en-US" sz="1500" dirty="0"/>
-          </a:p>
-          <a:p>
-            <a:pPr marL="342900" indent="-342900">
-              <a:buSzPct val="100000"/>
-              <a:buChar char="•"/>
-            </a:pPr>
-            <a:r>
-              <a:rPr lang="en-US" sz="1200" dirty="0">
-                <a:solidFill>
-                  <a:srgbClr val="E2E8F0"/>
-                </a:solidFill>
-                <a:latin typeface="Calibri" pitchFamily="34" charset="0"/>
-                <a:ea typeface="Calibri" pitchFamily="34" charset="-122"/>
-                <a:cs typeface="Calibri" pitchFamily="34" charset="-120"/>
-              </a:rPr>
-              <a:t>Méthode 2 : benchmark empirique (mesure de temps réel en Java)</a:t>
-            </a:r>
-            <a:endParaRPr lang="en-US" sz="1500" dirty="0"/>
-          </a:p>
-          <a:p>
-            <a:pPr marL="342900" indent="-342900">
-              <a:buSzPct val="100000"/>
-              <a:buChar char="•"/>
-            </a:pPr>
-            <a:r>
-              <a:rPr lang="en-US" sz="1200" dirty="0">
-                <a:solidFill>
-                  <a:srgbClr val="E2E8F0"/>
-                </a:solidFill>
-                <a:latin typeface="Calibri" pitchFamily="34" charset="0"/>
-                <a:ea typeface="Calibri" pitchFamily="34" charset="-122"/>
-                <a:cs typeface="Calibri" pitchFamily="34" charset="-120"/>
-              </a:rPr>
-              <a:t>Illustrer CHAQUE méthode avec un exemple concret et des résultats</a:t>
-            </a:r>
-            <a:endParaRPr lang="en-US" sz="1500" dirty="0"/>
+              <a:t>CPU, mémoire, GC, I/O</a:t>
+            </a:r>
+            <a:endParaRPr lang="en-US" sz="1100" dirty="0"/>
           </a:p>
         </p:txBody>
       </p:sp>
